--- a/documents/ensights-thesis-defense.pptx
+++ b/documents/ensights-thesis-defense.pptx
@@ -6735,7 +6735,7 @@
                 </a:solidFill>
                 <a:latin typeface="Calibri"/>
               </a:rPr>
-              <a:t>Είκοσι δύο endpoints κάτω από το /api/v1, με ζωντανή δοκιμή στο Swagger UI στο /try.</a:t>
+              <a:t>Είκοσι δύο endpoints ανάλυσης, εικοσιένα ερωτήματα και ένα εισαγωγής, με ζωντανή δοκιμή στο Swagger UI στο /try.</a:t>
             </a:r>
           </a:p>
         </p:txBody>

--- a/documents/ensights-thesis-defense.pptx
+++ b/documents/ensights-thesis-defense.pptx
@@ -9870,7 +9870,7 @@
                 </a:solidFill>
                 <a:latin typeface="Calibri"/>
               </a:rPr>
-              <a:t>Το Ηνωμένο Βασίλειο κάνει περίπου το 86% των εσόδων. Στην Ιρλανδία πέντε πελάτες φέρνουν περισσότερα από τους εκατόν επτά της Γερμανίας. Αυτό είναι σχέση χονδρικής, όχι λιανικής.</a:t>
+              <a:t>Το Ηνωμένο Βασίλειο κάνει περίπου το 86% των εσόδων. Στην Ιρλανδία τρεις πελάτες φέρνουν περισσότερα από τους εκατόν επτά της Γερμανίας. Αυτό είναι σχέση χονδρικής, όχι λιανικής.</a:t>
             </a:r>
           </a:p>
         </p:txBody>

--- a/documents/ensights-thesis-defense.pptx
+++ b/documents/ensights-thesis-defense.pptx
@@ -7705,7 +7705,7 @@
         <p:spPr>
           <a:xfrm>
             <a:off x="548640" y="1760601"/>
-            <a:ext cx="5349240" cy="2692939"/>
+            <a:ext cx="5349240" cy="2652636"/>
           </a:xfrm>
           <a:prstGeom prst="rect">
             <a:avLst/>
@@ -7721,7 +7721,7 @@
         <p:spPr>
           <a:xfrm>
             <a:off x="548640" y="1760601"/>
-            <a:ext cx="5349240" cy="2692939"/>
+            <a:ext cx="5349240" cy="2652636"/>
           </a:xfrm>
           <a:prstGeom prst="rect">
             <a:avLst/>
@@ -7764,7 +7764,7 @@
         </p:nvSpPr>
         <p:spPr>
           <a:xfrm>
-            <a:off x="548640" y="4544980"/>
+            <a:off x="548640" y="4504677"/>
             <a:ext cx="5349240" cy="292608"/>
           </a:xfrm>
           <a:prstGeom prst="rect">

--- a/documents/ensights-thesis-defense.pptx
+++ b/documents/ensights-thesis-defense.pptx
@@ -6507,7 +6507,7 @@
                 </a:solidFill>
                 <a:latin typeface="Calibri"/>
               </a:rPr>
-              <a:t>Αθήνα, Οκτώβριος 2026</a:t>
+              <a:t>Αθήνα, Σεπτέμβριος 2026</a:t>
             </a:r>
           </a:p>
         </p:txBody>

--- a/documents/ensights-thesis-defense.pptx
+++ b/documents/ensights-thesis-defense.pptx
@@ -21951,7 +21951,7 @@
                 </a:solidFill>
                 <a:latin typeface="Calibri"/>
               </a:rPr>
-              <a:t>8,69 ναι</a:t>
+              <a:t>8,68 ναι</a:t>
             </a:r>
           </a:p>
         </p:txBody>
@@ -22077,7 +22077,7 @@
                 </a:solidFill>
                 <a:latin typeface="Calibri"/>
               </a:rPr>
-              <a:t>0,97 όχι</a:t>
+              <a:t>0,96 όχι</a:t>
             </a:r>
           </a:p>
         </p:txBody>

--- a/documents/ensights-thesis-defense.pptx
+++ b/documents/ensights-thesis-defense.pptx
@@ -534,34 +534,9 @@
             <a:noAutofit/>
           </a:bodyPr>
           <a:p>
-            <a:pPr indent="0" algn="l">
-              <a:lnSpc>
-                <a:spcPct val="100000"/>
-              </a:lnSpc>
-              <a:buNone/>
-              <a:tabLst>
-                <a:tab pos="0" algn="l"/>
-              </a:tabLst>
-            </a:pPr>
-            <a:r>
-              <a:rPr lang="en-US" sz="2000" b="0" u="none" strike="noStrike">
-                <a:solidFill>
-                  <a:srgbClr val="000000"/>
-                </a:solidFill>
-                <a:effectLst/>
-                <a:uFillTx/>
-                <a:latin typeface="Arial"/>
-              </a:rPr>
-              <a:t>Καλησπέρα σας. Λέγομαι Χρήστος Μουρτογιάννης και θα σας παρουσιάσω τη διπλωματική μου εργασία, με θέμα την εξαγωγή αναλύσεων από δεδομένα ηλεκτρονικού εμπορίου. Επιβλέπων είναι ο καθηγητής Ευστάθιος Χατζηευθυμιάδης.</a:t>
-            </a:r>
-            <a:endParaRPr lang="en-US" sz="2000" b="0" u="none" strike="noStrike">
-              <a:solidFill>
-                <a:srgbClr val="000000"/>
-              </a:solidFill>
-              <a:effectLst/>
-              <a:uFillTx/>
-              <a:latin typeface="Arial"/>
-            </a:endParaRPr>
+            <a:r>
+              <a:t>Καλησπέρα σας. Ονομάζομαι Μουρτογιάννης Χρήστος και θα σας παρουσιάσω τη διπλωματική μου εργασία, με θέμα: Εξαγωγή Ευφυών Αναλύσεων από Δεδομένα Ηλεκτρονικού Εμπορίου.</a:t>
+            </a:r>
           </a:p>
         </p:txBody>
       </p:sp>
@@ -1227,155 +1202,9 @@
             <a:noAutofit/>
           </a:bodyPr>
           <a:p>
-            <a:pPr indent="0" algn="l">
-              <a:lnSpc>
-                <a:spcPct val="100000"/>
-              </a:lnSpc>
-              <a:buNone/>
-              <a:tabLst>
-                <a:tab pos="0" algn="l"/>
-              </a:tabLst>
-            </a:pPr>
-            <a:r>
-              <a:rPr lang="en-US" sz="2000" b="0" u="none" strike="noStrike">
-                <a:solidFill>
-                  <a:srgbClr val="000000"/>
-                </a:solidFill>
-                <a:effectLst/>
-                <a:uFillTx/>
-                <a:latin typeface="Arial"/>
-              </a:rPr>
-              <a:t>Τρίτ</a:t>
-            </a:r>
-            <a:r>
-              <a:rPr lang="en-US" sz="2000" b="0" u="none" strike="noStrike">
-                <a:solidFill>
-                  <a:srgbClr val="000000"/>
-                </a:solidFill>
-                <a:effectLst/>
-                <a:uFillTx/>
-                <a:latin typeface="Arial"/>
-              </a:rPr>
-              <a:t>ο </a:t>
-            </a:r>
-            <a:r>
-              <a:rPr lang="en-US" sz="2000" b="0" u="none" strike="noStrike">
-                <a:solidFill>
-                  <a:srgbClr val="000000"/>
-                </a:solidFill>
-                <a:effectLst/>
-                <a:uFillTx/>
-                <a:latin typeface="Arial"/>
-              </a:rPr>
-              <a:t>μέρο</a:t>
-            </a:r>
-            <a:r>
-              <a:rPr lang="en-US" sz="2000" b="0" u="none" strike="noStrike">
-                <a:solidFill>
-                  <a:srgbClr val="000000"/>
-                </a:solidFill>
-                <a:effectLst/>
-                <a:uFillTx/>
-                <a:latin typeface="Arial"/>
-              </a:rPr>
-              <a:t>ς: τι </a:t>
-            </a:r>
-            <a:r>
-              <a:rPr lang="en-US" sz="2000" b="0" u="none" strike="noStrike">
-                <a:solidFill>
-                  <a:srgbClr val="000000"/>
-                </a:solidFill>
-                <a:effectLst/>
-                <a:uFillTx/>
-                <a:latin typeface="Arial"/>
-              </a:rPr>
-              <a:t>βρή</a:t>
-            </a:r>
-            <a:r>
-              <a:rPr lang="en-US" sz="2000" b="0" u="none" strike="noStrike">
-                <a:solidFill>
-                  <a:srgbClr val="000000"/>
-                </a:solidFill>
-                <a:effectLst/>
-                <a:uFillTx/>
-                <a:latin typeface="Arial"/>
-              </a:rPr>
-              <a:t>καμε </a:t>
-            </a:r>
-            <a:r>
-              <a:rPr lang="en-US" sz="2000" b="0" u="none" strike="noStrike">
-                <a:solidFill>
-                  <a:srgbClr val="000000"/>
-                </a:solidFill>
-                <a:effectLst/>
-                <a:uFillTx/>
-                <a:latin typeface="Arial"/>
-              </a:rPr>
-              <a:t>μέσ</a:t>
-            </a:r>
-            <a:r>
-              <a:rPr lang="en-US" sz="2000" b="0" u="none" strike="noStrike">
-                <a:solidFill>
-                  <a:srgbClr val="000000"/>
-                </a:solidFill>
-                <a:effectLst/>
-                <a:uFillTx/>
-                <a:latin typeface="Arial"/>
-              </a:rPr>
-              <a:t>α </a:t>
-            </a:r>
-            <a:r>
-              <a:rPr lang="en-US" sz="2000" b="0" u="none" strike="noStrike">
-                <a:solidFill>
-                  <a:srgbClr val="000000"/>
-                </a:solidFill>
-                <a:effectLst/>
-                <a:uFillTx/>
-                <a:latin typeface="Arial"/>
-              </a:rPr>
-              <a:t>στα </a:t>
-            </a:r>
-            <a:r>
-              <a:rPr lang="en-US" sz="2000" b="0" u="none" strike="noStrike">
-                <a:solidFill>
-                  <a:srgbClr val="000000"/>
-                </a:solidFill>
-                <a:effectLst/>
-                <a:uFillTx/>
-                <a:latin typeface="Arial"/>
-              </a:rPr>
-              <a:t>δεδο</a:t>
-            </a:r>
-            <a:r>
-              <a:rPr lang="en-US" sz="2000" b="0" u="none" strike="noStrike">
-                <a:solidFill>
-                  <a:srgbClr val="000000"/>
-                </a:solidFill>
-                <a:effectLst/>
-                <a:uFillTx/>
-                <a:latin typeface="Arial"/>
-              </a:rPr>
-              <a:t>μένα</a:t>
-            </a:r>
-            <a:r>
-              <a:rPr lang="en-US" sz="2000" b="0" u="none" strike="noStrike">
-                <a:solidFill>
-                  <a:srgbClr val="000000"/>
-                </a:solidFill>
-                <a:effectLst/>
-                <a:uFillTx/>
-                <a:latin typeface="Arial"/>
-              </a:rPr>
-              <a:t>.</a:t>
-            </a:r>
-            <a:endParaRPr lang="en-US" sz="2000" b="0" u="none" strike="noStrike">
-              <a:solidFill>
-                <a:srgbClr val="000000"/>
-              </a:solidFill>
-              <a:effectLst/>
-              <a:uFillTx/>
-              <a:latin typeface="Arial"/>
-            </a:endParaRPr>
+            <a:r>
+              <a:t>Τρίτο μέρος: Τα ευρήματα.</a:t>
+            </a:r>
           </a:p>
         </p:txBody>
       </p:sp>
@@ -9185,67 +9014,9 @@
             <a:noAutofit/>
           </a:bodyPr>
           <a:p>
-            <a:pPr indent="0" algn="l">
-              <a:lnSpc>
-                <a:spcPct val="100000"/>
-              </a:lnSpc>
-              <a:buNone/>
-              <a:tabLst>
-                <a:tab pos="0" algn="l"/>
-              </a:tabLst>
-            </a:pPr>
-            <a:r>
-              <a:rPr lang="en-US" sz="2000" b="0" u="none" strike="noStrike">
-                <a:solidFill>
-                  <a:srgbClr val="000000"/>
-                </a:solidFill>
-                <a:effectLst/>
-                <a:uFillTx/>
-                <a:latin typeface="Arial"/>
-              </a:rPr>
-              <a:t>Τέταρτο μέρος: </a:t>
-            </a:r>
-            <a:r>
-              <a:rPr lang="en-US" sz="2000" b="0" u="none" strike="noStrike">
-                <a:solidFill>
-                  <a:srgbClr val="000000"/>
-                </a:solidFill>
-                <a:effectLst/>
-                <a:uFillTx/>
-                <a:latin typeface="Arial"/>
-              </a:rPr>
-              <a:t>συμπεράσματα, </a:t>
-            </a:r>
-            <a:r>
-              <a:rPr lang="en-US" sz="2000" b="0" u="none" strike="noStrike">
-                <a:solidFill>
-                  <a:srgbClr val="000000"/>
-                </a:solidFill>
-                <a:effectLst/>
-                <a:uFillTx/>
-                <a:latin typeface="Arial"/>
-              </a:rPr>
-              <a:t>περιορισμοί και </a:t>
-            </a:r>
-            <a:r>
-              <a:rPr lang="en-US" sz="2000" b="0" u="none" strike="noStrike">
-                <a:solidFill>
-                  <a:srgbClr val="000000"/>
-                </a:solidFill>
-                <a:effectLst/>
-                <a:uFillTx/>
-                <a:latin typeface="Arial"/>
-              </a:rPr>
-              <a:t>επεκτάσεις.</a:t>
-            </a:r>
-            <a:endParaRPr lang="en-US" sz="2000" b="0" u="none" strike="noStrike">
-              <a:solidFill>
-                <a:srgbClr val="000000"/>
-              </a:solidFill>
-              <a:effectLst/>
-              <a:uFillTx/>
-              <a:latin typeface="Arial"/>
-            </a:endParaRPr>
+            <a:r>
+              <a:t>Τέταρτο μέρος: Συμπεράσματα.</a:t>
+            </a:r>
           </a:p>
         </p:txBody>
       </p:sp>
@@ -9813,56 +9584,9 @@
             <a:noAutofit/>
           </a:bodyPr>
           <a:p>
-            <a:pPr indent="0" algn="l">
-              <a:lnSpc>
-                <a:spcPct val="100000"/>
-              </a:lnSpc>
-              <a:buNone/>
-              <a:tabLst>
-                <a:tab pos="0" algn="l"/>
-              </a:tabLst>
-            </a:pPr>
-            <a:r>
-              <a:rPr lang="en-US" sz="2000" b="0" u="none" strike="noStrike">
-                <a:solidFill>
-                  <a:srgbClr val="000000"/>
-                </a:solidFill>
-                <a:effectLst/>
-                <a:uFillTx/>
-                <a:latin typeface="Arial"/>
-              </a:rPr>
-              <a:t>Πρώτο μέρος: το </a:t>
-            </a:r>
-            <a:r>
-              <a:rPr lang="en-US" sz="2000" b="0" u="none" strike="noStrike">
-                <a:solidFill>
-                  <a:srgbClr val="000000"/>
-                </a:solidFill>
-                <a:effectLst/>
-                <a:uFillTx/>
-                <a:latin typeface="Arial"/>
-              </a:rPr>
-              <a:t>πρόβλημα και οι </a:t>
-            </a:r>
-            <a:r>
-              <a:rPr lang="en-US" sz="2000" b="0" u="none" strike="noStrike">
-                <a:solidFill>
-                  <a:srgbClr val="000000"/>
-                </a:solidFill>
-                <a:effectLst/>
-                <a:uFillTx/>
-                <a:latin typeface="Arial"/>
-              </a:rPr>
-              <a:t>στόχοι.</a:t>
-            </a:r>
-            <a:endParaRPr lang="en-US" sz="2000" b="0" u="none" strike="noStrike">
-              <a:solidFill>
-                <a:srgbClr val="000000"/>
-              </a:solidFill>
-              <a:effectLst/>
-              <a:uFillTx/>
-              <a:latin typeface="Arial"/>
-            </a:endParaRPr>
+            <a:r>
+              <a:t>Πρώτο μέρος: Το πρόβλημα.</a:t>
+            </a:r>
           </a:p>
         </p:txBody>
       </p:sp>
@@ -11205,111 +10929,9 @@
             <a:noAutofit/>
           </a:bodyPr>
           <a:p>
-            <a:pPr indent="0" algn="l">
-              <a:lnSpc>
-                <a:spcPct val="100000"/>
-              </a:lnSpc>
-              <a:buNone/>
-              <a:tabLst>
-                <a:tab pos="0" algn="l"/>
-              </a:tabLst>
-            </a:pPr>
-            <a:r>
-              <a:rPr lang="en-US" sz="2000" b="0" u="none" strike="noStrike">
-                <a:solidFill>
-                  <a:srgbClr val="000000"/>
-                </a:solidFill>
-                <a:effectLst/>
-                <a:uFillTx/>
-                <a:latin typeface="Arial"/>
-              </a:rPr>
-              <a:t>Δεύτερο </a:t>
-            </a:r>
-            <a:r>
-              <a:rPr lang="en-US" sz="2000" b="0" u="none" strike="noStrike">
-                <a:solidFill>
-                  <a:srgbClr val="000000"/>
-                </a:solidFill>
-                <a:effectLst/>
-                <a:uFillTx/>
-                <a:latin typeface="Arial"/>
-              </a:rPr>
-              <a:t>μέρος: το </a:t>
-            </a:r>
-            <a:r>
-              <a:rPr lang="en-US" sz="2000" b="0" u="none" strike="noStrike">
-                <a:solidFill>
-                  <a:srgbClr val="000000"/>
-                </a:solidFill>
-                <a:effectLst/>
-                <a:uFillTx/>
-                <a:latin typeface="Arial"/>
-              </a:rPr>
-              <a:t>σύστημα, </a:t>
-            </a:r>
-            <a:r>
-              <a:rPr lang="en-US" sz="2000" b="0" u="none" strike="noStrike">
-                <a:solidFill>
-                  <a:srgbClr val="000000"/>
-                </a:solidFill>
-                <a:effectLst/>
-                <a:uFillTx/>
-                <a:latin typeface="Arial"/>
-              </a:rPr>
-              <a:t>πώς είναι </a:t>
-            </a:r>
-            <a:r>
-              <a:rPr lang="en-US" sz="2000" b="0" u="none" strike="noStrike">
-                <a:solidFill>
-                  <a:srgbClr val="000000"/>
-                </a:solidFill>
-                <a:effectLst/>
-                <a:uFillTx/>
-                <a:latin typeface="Arial"/>
-              </a:rPr>
-              <a:t>φτιαγμέν</a:t>
-            </a:r>
-            <a:r>
-              <a:rPr lang="en-US" sz="2000" b="0" u="none" strike="noStrike">
-                <a:solidFill>
-                  <a:srgbClr val="000000"/>
-                </a:solidFill>
-                <a:effectLst/>
-                <a:uFillTx/>
-                <a:latin typeface="Arial"/>
-              </a:rPr>
-              <a:t>ο και </a:t>
-            </a:r>
-            <a:r>
-              <a:rPr lang="en-US" sz="2000" b="0" u="none" strike="noStrike">
-                <a:solidFill>
-                  <a:srgbClr val="000000"/>
-                </a:solidFill>
-                <a:effectLst/>
-                <a:uFillTx/>
-                <a:latin typeface="Arial"/>
-              </a:rPr>
-              <a:t>πώς </a:t>
-            </a:r>
-            <a:r>
-              <a:rPr lang="en-US" sz="2000" b="0" u="none" strike="noStrike">
-                <a:solidFill>
-                  <a:srgbClr val="000000"/>
-                </a:solidFill>
-                <a:effectLst/>
-                <a:uFillTx/>
-                <a:latin typeface="Arial"/>
-              </a:rPr>
-              <a:t>τρέχει.</a:t>
-            </a:r>
-            <a:endParaRPr lang="en-US" sz="2000" b="0" u="none" strike="noStrike">
-              <a:solidFill>
-                <a:srgbClr val="000000"/>
-              </a:solidFill>
-              <a:effectLst/>
-              <a:uFillTx/>
-              <a:latin typeface="Arial"/>
-            </a:endParaRPr>
+            <a:r>
+              <a:t>Δεύτερο μέρος: Το σύστημα.</a:t>
+            </a:r>
           </a:p>
         </p:txBody>
       </p:sp>
@@ -16396,756 +16018,6 @@
           </a:p>
         </p:txBody>
       </p:sp>
-      <p:sp>
-        <p:nvSpPr>
-          <p:cNvPr id="194" name="Rectangle 4"/>
-          <p:cNvSpPr/>
-          <p:nvPr/>
-        </p:nvSpPr>
-        <p:spPr>
-          <a:xfrm>
-            <a:off x="360" y="360"/>
-            <a:ext cx="12191040" cy="6857280"/>
-          </a:xfrm>
-          <a:prstGeom prst="rect">
-            <a:avLst/>
-          </a:prstGeom>
-          <a:solidFill>
-            <a:schemeClr val="accent1"/>
-          </a:solidFill>
-          <a:ln w="9360">
-            <a:noFill/>
-          </a:ln>
-          <a:effectLst>
-            <a:outerShdw blurRad="39960" dir="5400000" dist="23040" rotWithShape="0">
-              <a:srgbClr val="000000">
-                <a:alpha val="35000"/>
-              </a:srgbClr>
-            </a:outerShdw>
-          </a:effectLst>
-        </p:spPr>
-        <p:style>
-          <a:lnRef idx="0"/>
-          <a:fillRef idx="0"/>
-          <a:effectRef idx="0"/>
-          <a:fontRef idx="minor"/>
-        </p:style>
-        <p:txBody>
-          <a:bodyPr lIns="90000" tIns="45000" rIns="90000" bIns="45000" anchor="ctr">
-            <a:noAutofit/>
-          </a:bodyPr>
-          <a:p>
-            <a:pPr/>
-            <a:endParaRPr lang="en-US" sz="1800" b="0" u="none" strike="noStrike">
-              <a:solidFill>
-                <a:schemeClr val="lt1"/>
-              </a:solidFill>
-              <a:effectLst/>
-              <a:uFillTx/>
-              <a:latin typeface="Calibri"/>
-            </a:endParaRPr>
-          </a:p>
-        </p:txBody>
-      </p:sp>
-      <p:sp>
-        <p:nvSpPr>
-          <p:cNvPr id="195" name="TextBox 2"/>
-          <p:cNvSpPr/>
-          <p:nvPr/>
-        </p:nvSpPr>
-        <p:spPr>
-          <a:xfrm>
-            <a:off x="549000" y="1600560"/>
-            <a:ext cx="11090880" cy="1645200"/>
-          </a:xfrm>
-          <a:prstGeom prst="rect">
-            <a:avLst/>
-          </a:prstGeom>
-          <a:noFill/>
-          <a:ln w="0">
-            <a:noFill/>
-          </a:ln>
-        </p:spPr>
-        <p:style>
-          <a:lnRef idx="0"/>
-          <a:fillRef idx="0"/>
-          <a:effectRef idx="0"/>
-          <a:fontRef idx="minor"/>
-        </p:style>
-        <p:txBody>
-          <a:bodyPr lIns="0" tIns="0" rIns="0" bIns="0" anchor="t">
-            <a:spAutoFit/>
-          </a:bodyPr>
-          <a:p>
-            <a:pPr/>
-            <a:endParaRPr lang="en-US" sz="1800" b="0" u="none" strike="noStrike">
-              <a:solidFill>
-                <a:srgbClr val="000000"/>
-              </a:solidFill>
-              <a:effectLst/>
-              <a:uFillTx/>
-              <a:latin typeface="Arial"/>
-            </a:endParaRPr>
-          </a:p>
-        </p:txBody>
-      </p:sp>
-      <p:sp>
-        <p:nvSpPr>
-          <p:cNvPr id="196" name="TextBox 3"/>
-          <p:cNvSpPr/>
-          <p:nvPr/>
-        </p:nvSpPr>
-        <p:spPr>
-          <a:xfrm>
-            <a:off x="549000" y="2972160"/>
-            <a:ext cx="11090880" cy="743400"/>
-          </a:xfrm>
-          <a:prstGeom prst="rect">
-            <a:avLst/>
-          </a:prstGeom>
-          <a:noFill/>
-          <a:ln w="0">
-            <a:noFill/>
-          </a:ln>
-        </p:spPr>
-        <p:style>
-          <a:lnRef idx="0"/>
-          <a:fillRef idx="0"/>
-          <a:effectRef idx="0"/>
-          <a:fontRef idx="minor"/>
-        </p:style>
-        <p:txBody>
-          <a:bodyPr lIns="0" tIns="0" rIns="0" bIns="0" anchor="t">
-            <a:spAutoFit/>
-          </a:bodyPr>
-          <a:p>
-            <a:pPr defTabSz="457200">
-              <a:lnSpc>
-                <a:spcPct val="122000"/>
-              </a:lnSpc>
-            </a:pPr>
-            <a:r>
-              <a:rPr lang="en-US" sz="4000" b="1" u="none" strike="noStrike">
-                <a:solidFill>
-                  <a:srgbClr val="E8A33D"/>
-                </a:solidFill>
-                <a:effectLst/>
-                <a:uFillTx/>
-                <a:latin typeface="Calibri"/>
-                <a:ea typeface="DejaVu Sans"/>
-              </a:rPr>
-              <a:t>2η </a:t>
-            </a:r>
-            <a:r>
-              <a:rPr lang="en-US" sz="4000" b="1" u="none" strike="noStrike">
-                <a:solidFill>
-                  <a:srgbClr val="E8A33D"/>
-                </a:solidFill>
-                <a:effectLst/>
-                <a:uFillTx/>
-                <a:latin typeface="Calibri"/>
-                <a:ea typeface="DejaVu Sans"/>
-              </a:rPr>
-              <a:t>ΕΝΟΤΗ</a:t>
-            </a:r>
-            <a:r>
-              <a:rPr lang="en-US" sz="4000" b="1" u="none" strike="noStrike">
-                <a:solidFill>
-                  <a:srgbClr val="E8A33D"/>
-                </a:solidFill>
-                <a:effectLst/>
-                <a:uFillTx/>
-                <a:latin typeface="Calibri"/>
-                <a:ea typeface="DejaVu Sans"/>
-              </a:rPr>
-              <a:t>ΤΑ</a:t>
-            </a:r>
-            <a:endParaRPr lang="en-US" sz="4000" b="0" u="none" strike="noStrike">
-              <a:solidFill>
-                <a:srgbClr val="000000"/>
-              </a:solidFill>
-              <a:effectLst/>
-              <a:uFillTx/>
-              <a:latin typeface="Arial"/>
-            </a:endParaRPr>
-          </a:p>
-        </p:txBody>
-      </p:sp>
-      <p:sp>
-        <p:nvSpPr>
-          <p:cNvPr id="197" name="TextBox 4"/>
-          <p:cNvSpPr/>
-          <p:nvPr/>
-        </p:nvSpPr>
-        <p:spPr>
-          <a:xfrm>
-            <a:off x="549000" y="3804120"/>
-            <a:ext cx="11090880" cy="817560"/>
-          </a:xfrm>
-          <a:prstGeom prst="rect">
-            <a:avLst/>
-          </a:prstGeom>
-          <a:noFill/>
-          <a:ln w="0">
-            <a:noFill/>
-          </a:ln>
-        </p:spPr>
-        <p:style>
-          <a:lnRef idx="0"/>
-          <a:fillRef idx="0"/>
-          <a:effectRef idx="0"/>
-          <a:fontRef idx="minor"/>
-        </p:style>
-        <p:txBody>
-          <a:bodyPr lIns="0" tIns="0" rIns="0" bIns="0" anchor="t">
-            <a:spAutoFit/>
-          </a:bodyPr>
-          <a:p>
-            <a:pPr defTabSz="457200">
-              <a:lnSpc>
-                <a:spcPct val="122000"/>
-              </a:lnSpc>
-            </a:pPr>
-            <a:r>
-              <a:rPr lang="en-US" sz="4400" b="1" u="none" strike="noStrike">
-                <a:solidFill>
-                  <a:srgbClr val="FFFFFF"/>
-                </a:solidFill>
-                <a:effectLst/>
-                <a:uFillTx/>
-                <a:latin typeface="Cambria"/>
-                <a:ea typeface="DejaVu Sans"/>
-              </a:rPr>
-              <a:t>Το </a:t>
-            </a:r>
-            <a:r>
-              <a:rPr lang="en-US" sz="4400" b="1" u="none" strike="noStrike">
-                <a:solidFill>
-                  <a:srgbClr val="FFFFFF"/>
-                </a:solidFill>
-                <a:effectLst/>
-                <a:uFillTx/>
-                <a:latin typeface="Cambria"/>
-                <a:ea typeface="DejaVu Sans"/>
-              </a:rPr>
-              <a:t>σύστη</a:t>
-            </a:r>
-            <a:r>
-              <a:rPr lang="en-US" sz="4400" b="1" u="none" strike="noStrike">
-                <a:solidFill>
-                  <a:srgbClr val="FFFFFF"/>
-                </a:solidFill>
-                <a:effectLst/>
-                <a:uFillTx/>
-                <a:latin typeface="Cambria"/>
-                <a:ea typeface="DejaVu Sans"/>
-              </a:rPr>
-              <a:t>μα</a:t>
-            </a:r>
-            <a:endParaRPr lang="en-US" sz="4400" b="0" u="none" strike="noStrike">
-              <a:solidFill>
-                <a:srgbClr val="000000"/>
-              </a:solidFill>
-              <a:effectLst/>
-              <a:uFillTx/>
-              <a:latin typeface="Arial"/>
-            </a:endParaRPr>
-          </a:p>
-        </p:txBody>
-      </p:sp>
-      <p:sp>
-        <p:nvSpPr>
-          <p:cNvPr id="198" name="TextBox 5"/>
-          <p:cNvSpPr/>
-          <p:nvPr/>
-        </p:nvSpPr>
-        <p:spPr>
-          <a:xfrm>
-            <a:off x="549000" y="4645440"/>
-            <a:ext cx="11090880" cy="365040"/>
-          </a:xfrm>
-          <a:prstGeom prst="rect">
-            <a:avLst/>
-          </a:prstGeom>
-          <a:noFill/>
-          <a:ln w="0">
-            <a:noFill/>
-          </a:ln>
-        </p:spPr>
-        <p:style>
-          <a:lnRef idx="0"/>
-          <a:fillRef idx="0"/>
-          <a:effectRef idx="0"/>
-          <a:fontRef idx="minor"/>
-        </p:style>
-        <p:txBody>
-          <a:bodyPr lIns="0" tIns="0" rIns="0" bIns="0" anchor="t">
-            <a:spAutoFit/>
-          </a:bodyPr>
-          <a:p>
-            <a:pPr/>
-            <a:endParaRPr lang="en-US" sz="1800" b="0" u="none" strike="noStrike">
-              <a:solidFill>
-                <a:srgbClr val="000000"/>
-              </a:solidFill>
-              <a:effectLst/>
-              <a:uFillTx/>
-              <a:latin typeface="Arial"/>
-            </a:endParaRPr>
-          </a:p>
-        </p:txBody>
-      </p:sp>
-      <p:sp>
-        <p:nvSpPr>
-          <p:cNvPr id="199" name="TextBox 6"/>
-          <p:cNvSpPr/>
-          <p:nvPr/>
-        </p:nvSpPr>
-        <p:spPr>
-          <a:xfrm>
-            <a:off x="549000" y="6474240"/>
-            <a:ext cx="5485680" cy="273600"/>
-          </a:xfrm>
-          <a:prstGeom prst="rect">
-            <a:avLst/>
-          </a:prstGeom>
-          <a:noFill/>
-          <a:ln w="0">
-            <a:noFill/>
-          </a:ln>
-        </p:spPr>
-        <p:style>
-          <a:lnRef idx="0"/>
-          <a:fillRef idx="0"/>
-          <a:effectRef idx="0"/>
-          <a:fontRef idx="minor"/>
-        </p:style>
-        <p:txBody>
-          <a:bodyPr lIns="0" tIns="0" rIns="0" bIns="0" anchor="t">
-            <a:spAutoFit/>
-          </a:bodyPr>
-          <a:p>
-            <a:pPr/>
-            <a:endParaRPr lang="en-US" sz="1800" b="0" u="none" strike="noStrike">
-              <a:solidFill>
-                <a:srgbClr val="000000"/>
-              </a:solidFill>
-              <a:effectLst/>
-              <a:uFillTx/>
-              <a:latin typeface="Arial"/>
-            </a:endParaRPr>
-          </a:p>
-        </p:txBody>
-      </p:sp>
-      <p:sp>
-        <p:nvSpPr>
-          <p:cNvPr id="200" name="TextBox 7"/>
-          <p:cNvSpPr/>
-          <p:nvPr/>
-        </p:nvSpPr>
-        <p:spPr>
-          <a:xfrm>
-            <a:off x="11094840" y="6474240"/>
-            <a:ext cx="547920" cy="167760"/>
-          </a:xfrm>
-          <a:prstGeom prst="rect">
-            <a:avLst/>
-          </a:prstGeom>
-          <a:noFill/>
-          <a:ln w="0">
-            <a:noFill/>
-          </a:ln>
-        </p:spPr>
-        <p:style>
-          <a:lnRef idx="0"/>
-          <a:fillRef idx="0"/>
-          <a:effectRef idx="0"/>
-          <a:fontRef idx="minor"/>
-        </p:style>
-        <p:txBody>
-          <a:bodyPr lIns="0" tIns="0" rIns="0" bIns="0" anchor="t">
-            <a:spAutoFit/>
-          </a:bodyPr>
-          <a:p>
-            <a:pPr algn="r" defTabSz="457200">
-              <a:lnSpc>
-                <a:spcPct val="122000"/>
-              </a:lnSpc>
-            </a:pPr>
-            <a:r>
-              <a:rPr lang="en-US" sz="900" b="0" u="none" strike="noStrike">
-                <a:solidFill>
-                  <a:srgbClr val="D7E5D2"/>
-                </a:solidFill>
-                <a:effectLst/>
-                <a:uFillTx/>
-                <a:latin typeface="Calibri"/>
-                <a:ea typeface="DejaVu Sans"/>
-              </a:rPr>
-              <a:t>7</a:t>
-            </a:r>
-            <a:endParaRPr lang="en-US" sz="900" b="0" u="none" strike="noStrike">
-              <a:solidFill>
-                <a:srgbClr val="000000"/>
-              </a:solidFill>
-              <a:effectLst/>
-              <a:uFillTx/>
-              <a:latin typeface="Arial"/>
-            </a:endParaRPr>
-          </a:p>
-        </p:txBody>
-      </p:sp>
-      <p:sp>
-        <p:nvSpPr>
-          <p:cNvPr id="201" name="Rectangle 5"/>
-          <p:cNvSpPr/>
-          <p:nvPr/>
-        </p:nvSpPr>
-        <p:spPr>
-          <a:xfrm>
-            <a:off x="720" y="720"/>
-            <a:ext cx="12191040" cy="6857280"/>
-          </a:xfrm>
-          <a:prstGeom prst="rect">
-            <a:avLst/>
-          </a:prstGeom>
-          <a:solidFill>
-            <a:srgbClr val="28471F"/>
-          </a:solidFill>
-          <a:ln w="9360">
-            <a:noFill/>
-          </a:ln>
-          <a:effectLst>
-            <a:outerShdw blurRad="39960" dir="5400000" dist="23040" rotWithShape="0">
-              <a:srgbClr val="000000">
-                <a:alpha val="35000"/>
-              </a:srgbClr>
-            </a:outerShdw>
-          </a:effectLst>
-        </p:spPr>
-        <p:style>
-          <a:lnRef idx="0"/>
-          <a:fillRef idx="0"/>
-          <a:effectRef idx="0"/>
-          <a:fontRef idx="minor"/>
-        </p:style>
-        <p:txBody>
-          <a:bodyPr lIns="90000" tIns="45000" rIns="90000" bIns="45000" anchor="ctr">
-            <a:noAutofit/>
-          </a:bodyPr>
-          <a:p>
-            <a:pPr/>
-            <a:endParaRPr lang="en-US" sz="1800" b="0" u="none" strike="noStrike">
-              <a:solidFill>
-                <a:schemeClr val="lt1"/>
-              </a:solidFill>
-              <a:effectLst/>
-              <a:uFillTx/>
-              <a:latin typeface="Calibri"/>
-            </a:endParaRPr>
-          </a:p>
-        </p:txBody>
-      </p:sp>
-      <p:sp>
-        <p:nvSpPr>
-          <p:cNvPr id="202" name="TextBox 1"/>
-          <p:cNvSpPr/>
-          <p:nvPr/>
-        </p:nvSpPr>
-        <p:spPr>
-          <a:xfrm>
-            <a:off x="549360" y="1600920"/>
-            <a:ext cx="11090880" cy="1784160"/>
-          </a:xfrm>
-          <a:prstGeom prst="rect">
-            <a:avLst/>
-          </a:prstGeom>
-          <a:noFill/>
-          <a:ln w="0">
-            <a:noFill/>
-          </a:ln>
-        </p:spPr>
-        <p:style>
-          <a:lnRef idx="0"/>
-          <a:fillRef idx="0"/>
-          <a:effectRef idx="0"/>
-          <a:fontRef idx="minor"/>
-        </p:style>
-        <p:txBody>
-          <a:bodyPr lIns="0" tIns="0" rIns="0" bIns="0" anchor="t">
-            <a:spAutoFit/>
-          </a:bodyPr>
-          <a:p>
-            <a:pPr/>
-            <a:endParaRPr lang="en-US" sz="1800" b="0" u="none" strike="noStrike">
-              <a:solidFill>
-                <a:srgbClr val="000000"/>
-              </a:solidFill>
-              <a:effectLst/>
-              <a:uFillTx/>
-              <a:latin typeface="Arial"/>
-            </a:endParaRPr>
-          </a:p>
-        </p:txBody>
-      </p:sp>
-      <p:sp>
-        <p:nvSpPr>
-          <p:cNvPr id="203" name="TextBox 8"/>
-          <p:cNvSpPr/>
-          <p:nvPr/>
-        </p:nvSpPr>
-        <p:spPr>
-          <a:xfrm>
-            <a:off x="549360" y="2972520"/>
-            <a:ext cx="11090880" cy="743400"/>
-          </a:xfrm>
-          <a:prstGeom prst="rect">
-            <a:avLst/>
-          </a:prstGeom>
-          <a:noFill/>
-          <a:ln w="0">
-            <a:noFill/>
-          </a:ln>
-        </p:spPr>
-        <p:style>
-          <a:lnRef idx="0"/>
-          <a:fillRef idx="0"/>
-          <a:effectRef idx="0"/>
-          <a:fontRef idx="minor"/>
-        </p:style>
-        <p:txBody>
-          <a:bodyPr lIns="0" tIns="0" rIns="0" bIns="0" anchor="t">
-            <a:spAutoFit/>
-          </a:bodyPr>
-          <a:p>
-            <a:pPr defTabSz="457200">
-              <a:lnSpc>
-                <a:spcPct val="122000"/>
-              </a:lnSpc>
-            </a:pPr>
-            <a:r>
-              <a:rPr lang="en-US" sz="4000" b="1" u="none" strike="noStrike">
-                <a:solidFill>
-                  <a:srgbClr val="E8A33D"/>
-                </a:solidFill>
-                <a:effectLst/>
-                <a:uFillTx/>
-                <a:latin typeface="Calibri"/>
-                <a:ea typeface="DejaVu Sans"/>
-              </a:rPr>
-              <a:t>3η ΕΝΟΤΗΤΑ</a:t>
-            </a:r>
-            <a:endParaRPr lang="en-US" sz="4000" b="0" u="none" strike="noStrike">
-              <a:solidFill>
-                <a:srgbClr val="000000"/>
-              </a:solidFill>
-              <a:effectLst/>
-              <a:uFillTx/>
-              <a:latin typeface="Arial"/>
-            </a:endParaRPr>
-          </a:p>
-        </p:txBody>
-      </p:sp>
-      <p:sp>
-        <p:nvSpPr>
-          <p:cNvPr id="204" name="TextBox 9"/>
-          <p:cNvSpPr/>
-          <p:nvPr/>
-        </p:nvSpPr>
-        <p:spPr>
-          <a:xfrm>
-            <a:off x="549360" y="3804480"/>
-            <a:ext cx="11090880" cy="817560"/>
-          </a:xfrm>
-          <a:prstGeom prst="rect">
-            <a:avLst/>
-          </a:prstGeom>
-          <a:noFill/>
-          <a:ln w="0">
-            <a:noFill/>
-          </a:ln>
-        </p:spPr>
-        <p:style>
-          <a:lnRef idx="0"/>
-          <a:fillRef idx="0"/>
-          <a:effectRef idx="0"/>
-          <a:fontRef idx="minor"/>
-        </p:style>
-        <p:txBody>
-          <a:bodyPr lIns="0" tIns="0" rIns="0" bIns="0" anchor="t">
-            <a:spAutoFit/>
-          </a:bodyPr>
-          <a:p>
-            <a:pPr defTabSz="457200">
-              <a:lnSpc>
-                <a:spcPct val="122000"/>
-              </a:lnSpc>
-            </a:pPr>
-            <a:r>
-              <a:rPr lang="en-US" sz="4400" b="1" u="none" strike="noStrike">
-                <a:solidFill>
-                  <a:srgbClr val="FFFFFF"/>
-                </a:solidFill>
-                <a:effectLst/>
-                <a:uFillTx/>
-                <a:latin typeface="Cambria"/>
-                <a:ea typeface="DejaVu Sans"/>
-              </a:rPr>
-              <a:t>Τα ευρήματα</a:t>
-            </a:r>
-            <a:endParaRPr lang="en-US" sz="4400" b="0" u="none" strike="noStrike">
-              <a:solidFill>
-                <a:srgbClr val="000000"/>
-              </a:solidFill>
-              <a:effectLst/>
-              <a:uFillTx/>
-              <a:latin typeface="Arial"/>
-            </a:endParaRPr>
-          </a:p>
-        </p:txBody>
-      </p:sp>
-      <p:sp>
-        <p:nvSpPr>
-          <p:cNvPr id="205" name="TextBox 10"/>
-          <p:cNvSpPr/>
-          <p:nvPr/>
-        </p:nvSpPr>
-        <p:spPr>
-          <a:xfrm>
-            <a:off x="549360" y="4645800"/>
-            <a:ext cx="11090880" cy="278640"/>
-          </a:xfrm>
-          <a:prstGeom prst="rect">
-            <a:avLst/>
-          </a:prstGeom>
-          <a:noFill/>
-          <a:ln w="0">
-            <a:noFill/>
-          </a:ln>
-        </p:spPr>
-        <p:style>
-          <a:lnRef idx="0"/>
-          <a:fillRef idx="0"/>
-          <a:effectRef idx="0"/>
-          <a:fontRef idx="minor"/>
-        </p:style>
-        <p:txBody>
-          <a:bodyPr lIns="0" tIns="0" rIns="0" bIns="0" anchor="t">
-            <a:spAutoFit/>
-          </a:bodyPr>
-          <a:p>
-            <a:pPr/>
-            <a:endParaRPr lang="en-US" sz="1800" b="0" u="none" strike="noStrike">
-              <a:solidFill>
-                <a:srgbClr val="000000"/>
-              </a:solidFill>
-              <a:effectLst/>
-              <a:uFillTx/>
-              <a:latin typeface="Arial"/>
-            </a:endParaRPr>
-          </a:p>
-        </p:txBody>
-      </p:sp>
-      <p:sp>
-        <p:nvSpPr>
-          <p:cNvPr id="206" name="TextBox 11"/>
-          <p:cNvSpPr/>
-          <p:nvPr/>
-        </p:nvSpPr>
-        <p:spPr>
-          <a:xfrm>
-            <a:off x="549360" y="6474600"/>
-            <a:ext cx="5485680" cy="167760"/>
-          </a:xfrm>
-          <a:prstGeom prst="rect">
-            <a:avLst/>
-          </a:prstGeom>
-          <a:noFill/>
-          <a:ln w="0">
-            <a:noFill/>
-          </a:ln>
-        </p:spPr>
-        <p:style>
-          <a:lnRef idx="0"/>
-          <a:fillRef idx="0"/>
-          <a:effectRef idx="0"/>
-          <a:fontRef idx="minor"/>
-        </p:style>
-        <p:txBody>
-          <a:bodyPr lIns="0" tIns="0" rIns="0" bIns="0" anchor="t">
-            <a:spAutoFit/>
-          </a:bodyPr>
-          <a:p>
-            <a:pPr/>
-            <a:endParaRPr lang="en-US" sz="1800" b="0" u="none" strike="noStrike">
-              <a:solidFill>
-                <a:srgbClr val="000000"/>
-              </a:solidFill>
-              <a:effectLst/>
-              <a:uFillTx/>
-              <a:latin typeface="Arial"/>
-            </a:endParaRPr>
-          </a:p>
-        </p:txBody>
-      </p:sp>
-      <p:sp>
-        <p:nvSpPr>
-          <p:cNvPr id="207" name="TextBox 12"/>
-          <p:cNvSpPr/>
-          <p:nvPr/>
-        </p:nvSpPr>
-        <p:spPr>
-          <a:xfrm>
-            <a:off x="11095200" y="6474600"/>
-            <a:ext cx="547920" cy="167760"/>
-          </a:xfrm>
-          <a:prstGeom prst="rect">
-            <a:avLst/>
-          </a:prstGeom>
-          <a:noFill/>
-          <a:ln w="0">
-            <a:noFill/>
-          </a:ln>
-        </p:spPr>
-        <p:style>
-          <a:lnRef idx="0"/>
-          <a:fillRef idx="0"/>
-          <a:effectRef idx="0"/>
-          <a:fontRef idx="minor"/>
-        </p:style>
-        <p:txBody>
-          <a:bodyPr lIns="0" tIns="0" rIns="0" bIns="0" anchor="t">
-            <a:spAutoFit/>
-          </a:bodyPr>
-          <a:p>
-            <a:pPr algn="r" defTabSz="457200">
-              <a:lnSpc>
-                <a:spcPct val="122000"/>
-              </a:lnSpc>
-            </a:pPr>
-            <a:r>
-              <a:rPr lang="en-US" sz="900" b="0" u="none" strike="noStrike">
-                <a:solidFill>
-                  <a:srgbClr val="D7E5D2"/>
-                </a:solidFill>
-                <a:effectLst/>
-                <a:uFillTx/>
-                <a:latin typeface="Calibri"/>
-                <a:ea typeface="DejaVu Sans"/>
-              </a:rPr>
-              <a:t>3</a:t>
-            </a:r>
-            <a:endParaRPr lang="en-US" sz="900" b="0" u="none" strike="noStrike">
-              <a:solidFill>
-                <a:srgbClr val="000000"/>
-              </a:solidFill>
-              <a:effectLst/>
-              <a:uFillTx/>
-              <a:latin typeface="Arial"/>
-            </a:endParaRPr>
-          </a:p>
-        </p:txBody>
-      </p:sp>
     </p:spTree>
   </p:cSld>
   <mc:AlternateContent>
@@ -31470,1263 +30342,6 @@
           </a:p>
         </p:txBody>
       </p:sp>
-      <p:sp>
-        <p:nvSpPr>
-          <p:cNvPr id="394" name="Rectangle 12"/>
-          <p:cNvSpPr/>
-          <p:nvPr/>
-        </p:nvSpPr>
-        <p:spPr>
-          <a:xfrm>
-            <a:off x="0" y="0"/>
-            <a:ext cx="12191040" cy="6857280"/>
-          </a:xfrm>
-          <a:prstGeom prst="rect">
-            <a:avLst/>
-          </a:prstGeom>
-          <a:solidFill>
-            <a:schemeClr val="accent1"/>
-          </a:solidFill>
-          <a:ln w="9360">
-            <a:noFill/>
-          </a:ln>
-          <a:effectLst>
-            <a:outerShdw blurRad="39960" dir="5400000" dist="23040" rotWithShape="0">
-              <a:srgbClr val="000000">
-                <a:alpha val="35000"/>
-              </a:srgbClr>
-            </a:outerShdw>
-          </a:effectLst>
-        </p:spPr>
-        <p:style>
-          <a:lnRef idx="0"/>
-          <a:fillRef idx="0"/>
-          <a:effectRef idx="0"/>
-          <a:fontRef idx="minor"/>
-        </p:style>
-        <p:txBody>
-          <a:bodyPr lIns="90000" tIns="45000" rIns="90000" bIns="45000" anchor="ctr">
-            <a:noAutofit/>
-          </a:bodyPr>
-          <a:p>
-            <a:pPr/>
-            <a:endParaRPr lang="en-US" sz="1800" b="0" u="none" strike="noStrike">
-              <a:solidFill>
-                <a:schemeClr val="lt1"/>
-              </a:solidFill>
-              <a:effectLst/>
-              <a:uFillTx/>
-              <a:latin typeface="Calibri"/>
-            </a:endParaRPr>
-          </a:p>
-        </p:txBody>
-      </p:sp>
-      <p:sp>
-        <p:nvSpPr>
-          <p:cNvPr id="395" name="TextBox 2"/>
-          <p:cNvSpPr/>
-          <p:nvPr/>
-        </p:nvSpPr>
-        <p:spPr>
-          <a:xfrm>
-            <a:off x="548640" y="1600200"/>
-            <a:ext cx="11090880" cy="1784880"/>
-          </a:xfrm>
-          <a:prstGeom prst="rect">
-            <a:avLst/>
-          </a:prstGeom>
-          <a:noFill/>
-          <a:ln w="0">
-            <a:noFill/>
-          </a:ln>
-        </p:spPr>
-        <p:style>
-          <a:lnRef idx="0"/>
-          <a:fillRef idx="0"/>
-          <a:effectRef idx="0"/>
-          <a:fontRef idx="minor"/>
-        </p:style>
-        <p:txBody>
-          <a:bodyPr lIns="0" tIns="0" rIns="0" bIns="0" anchor="t">
-            <a:spAutoFit/>
-          </a:bodyPr>
-          <a:p>
-            <a:pPr defTabSz="457200">
-              <a:lnSpc>
-                <a:spcPct val="122000"/>
-              </a:lnSpc>
-            </a:pPr>
-            <a:r>
-              <a:rPr lang="en-US" sz="9600" b="1" u="none" strike="noStrike">
-                <a:solidFill>
-                  <a:srgbClr val="3E6E43"/>
-                </a:solidFill>
-                <a:effectLst/>
-                <a:uFillTx/>
-                <a:latin typeface="Cambria"/>
-                <a:ea typeface="DejaVu Sans"/>
-              </a:rPr>
-              <a:t>03</a:t>
-            </a:r>
-            <a:endParaRPr lang="en-US" sz="9600" b="0" u="none" strike="noStrike">
-              <a:solidFill>
-                <a:srgbClr val="000000"/>
-              </a:solidFill>
-              <a:effectLst/>
-              <a:uFillTx/>
-              <a:latin typeface="Arial"/>
-            </a:endParaRPr>
-          </a:p>
-        </p:txBody>
-      </p:sp>
-      <p:sp>
-        <p:nvSpPr>
-          <p:cNvPr id="396" name="TextBox 3"/>
-          <p:cNvSpPr/>
-          <p:nvPr/>
-        </p:nvSpPr>
-        <p:spPr>
-          <a:xfrm>
-            <a:off x="548640" y="3474720"/>
-            <a:ext cx="11090880" cy="241920"/>
-          </a:xfrm>
-          <a:prstGeom prst="rect">
-            <a:avLst/>
-          </a:prstGeom>
-          <a:noFill/>
-          <a:ln w="0">
-            <a:noFill/>
-          </a:ln>
-        </p:spPr>
-        <p:style>
-          <a:lnRef idx="0"/>
-          <a:fillRef idx="0"/>
-          <a:effectRef idx="0"/>
-          <a:fontRef idx="minor"/>
-        </p:style>
-        <p:txBody>
-          <a:bodyPr lIns="0" tIns="0" rIns="0" bIns="0" anchor="t">
-            <a:spAutoFit/>
-          </a:bodyPr>
-          <a:p>
-            <a:pPr defTabSz="457200">
-              <a:lnSpc>
-                <a:spcPct val="122000"/>
-              </a:lnSpc>
-            </a:pPr>
-            <a:r>
-              <a:rPr lang="en-US" sz="1300" b="1" u="none" strike="noStrike">
-                <a:solidFill>
-                  <a:srgbClr val="E8A33D"/>
-                </a:solidFill>
-                <a:effectLst/>
-                <a:uFillTx/>
-                <a:latin typeface="Calibri"/>
-                <a:ea typeface="DejaVu Sans"/>
-              </a:rPr>
-              <a:t>ΕΝΟΤΗΤΑ</a:t>
-            </a:r>
-            <a:endParaRPr lang="en-US" sz="1300" b="0" u="none" strike="noStrike">
-              <a:solidFill>
-                <a:srgbClr val="000000"/>
-              </a:solidFill>
-              <a:effectLst/>
-              <a:uFillTx/>
-              <a:latin typeface="Arial"/>
-            </a:endParaRPr>
-          </a:p>
-        </p:txBody>
-      </p:sp>
-      <p:sp>
-        <p:nvSpPr>
-          <p:cNvPr id="397" name="TextBox 4"/>
-          <p:cNvSpPr/>
-          <p:nvPr/>
-        </p:nvSpPr>
-        <p:spPr>
-          <a:xfrm>
-            <a:off x="548640" y="3803760"/>
-            <a:ext cx="11090880" cy="817560"/>
-          </a:xfrm>
-          <a:prstGeom prst="rect">
-            <a:avLst/>
-          </a:prstGeom>
-          <a:noFill/>
-          <a:ln w="0">
-            <a:noFill/>
-          </a:ln>
-        </p:spPr>
-        <p:style>
-          <a:lnRef idx="0"/>
-          <a:fillRef idx="0"/>
-          <a:effectRef idx="0"/>
-          <a:fontRef idx="minor"/>
-        </p:style>
-        <p:txBody>
-          <a:bodyPr lIns="0" tIns="0" rIns="0" bIns="0" anchor="t">
-            <a:spAutoFit/>
-          </a:bodyPr>
-          <a:p>
-            <a:pPr defTabSz="457200">
-              <a:lnSpc>
-                <a:spcPct val="122000"/>
-              </a:lnSpc>
-            </a:pPr>
-            <a:r>
-              <a:rPr lang="en-US" sz="4400" b="1" u="none" strike="noStrike">
-                <a:solidFill>
-                  <a:srgbClr val="FFFFFF"/>
-                </a:solidFill>
-                <a:effectLst/>
-                <a:uFillTx/>
-                <a:latin typeface="Cambria"/>
-                <a:ea typeface="DejaVu Sans"/>
-              </a:rPr>
-              <a:t>Τα ευρήματα</a:t>
-            </a:r>
-            <a:endParaRPr lang="en-US" sz="4400" b="0" u="none" strike="noStrike">
-              <a:solidFill>
-                <a:srgbClr val="000000"/>
-              </a:solidFill>
-              <a:effectLst/>
-              <a:uFillTx/>
-              <a:latin typeface="Arial"/>
-            </a:endParaRPr>
-          </a:p>
-        </p:txBody>
-      </p:sp>
-      <p:sp>
-        <p:nvSpPr>
-          <p:cNvPr id="398" name="TextBox 5"/>
-          <p:cNvSpPr/>
-          <p:nvPr/>
-        </p:nvSpPr>
-        <p:spPr>
-          <a:xfrm>
-            <a:off x="548640" y="4645080"/>
-            <a:ext cx="11090880" cy="278640"/>
-          </a:xfrm>
-          <a:prstGeom prst="rect">
-            <a:avLst/>
-          </a:prstGeom>
-          <a:noFill/>
-          <a:ln w="0">
-            <a:noFill/>
-          </a:ln>
-        </p:spPr>
-        <p:style>
-          <a:lnRef idx="0"/>
-          <a:fillRef idx="0"/>
-          <a:effectRef idx="0"/>
-          <a:fontRef idx="minor"/>
-        </p:style>
-        <p:txBody>
-          <a:bodyPr lIns="0" tIns="0" rIns="0" bIns="0" anchor="t">
-            <a:spAutoFit/>
-          </a:bodyPr>
-          <a:p>
-            <a:pPr defTabSz="457200">
-              <a:lnSpc>
-                <a:spcPct val="122000"/>
-              </a:lnSpc>
-            </a:pPr>
-            <a:r>
-              <a:rPr lang="en-US" sz="1500" b="0" u="none" strike="noStrike">
-                <a:solidFill>
-                  <a:srgbClr val="D7E5D2"/>
-                </a:solidFill>
-                <a:effectLst/>
-                <a:uFillTx/>
-                <a:latin typeface="Calibri"/>
-                <a:ea typeface="DejaVu Sans"/>
-              </a:rPr>
-              <a:t>Τι βγήκε από ένα εκατομμύριο γραμμές πωλήσεων</a:t>
-            </a:r>
-            <a:endParaRPr lang="en-US" sz="1500" b="0" u="none" strike="noStrike">
-              <a:solidFill>
-                <a:srgbClr val="000000"/>
-              </a:solidFill>
-              <a:effectLst/>
-              <a:uFillTx/>
-              <a:latin typeface="Arial"/>
-            </a:endParaRPr>
-          </a:p>
-        </p:txBody>
-      </p:sp>
-      <p:sp>
-        <p:nvSpPr>
-          <p:cNvPr id="399" name="TextBox 6"/>
-          <p:cNvSpPr/>
-          <p:nvPr/>
-        </p:nvSpPr>
-        <p:spPr>
-          <a:xfrm>
-            <a:off x="548640" y="6473880"/>
-            <a:ext cx="5485680" cy="167760"/>
-          </a:xfrm>
-          <a:prstGeom prst="rect">
-            <a:avLst/>
-          </a:prstGeom>
-          <a:noFill/>
-          <a:ln w="0">
-            <a:noFill/>
-          </a:ln>
-        </p:spPr>
-        <p:style>
-          <a:lnRef idx="0"/>
-          <a:fillRef idx="0"/>
-          <a:effectRef idx="0"/>
-          <a:fontRef idx="minor"/>
-        </p:style>
-        <p:txBody>
-          <a:bodyPr lIns="0" tIns="0" rIns="0" bIns="0" anchor="t">
-            <a:spAutoFit/>
-          </a:bodyPr>
-          <a:p>
-            <a:pPr defTabSz="457200">
-              <a:lnSpc>
-                <a:spcPct val="122000"/>
-              </a:lnSpc>
-            </a:pPr>
-            <a:r>
-              <a:rPr lang="en-US" sz="900" b="0" u="none" strike="noStrike">
-                <a:solidFill>
-                  <a:srgbClr val="D7E5D2"/>
-                </a:solidFill>
-                <a:effectLst/>
-                <a:uFillTx/>
-                <a:latin typeface="Calibri"/>
-                <a:ea typeface="DejaVu Sans"/>
-              </a:rPr>
-              <a:t>ENSIGHTS · Διπλωματική εργασία</a:t>
-            </a:r>
-            <a:endParaRPr lang="en-US" sz="900" b="0" u="none" strike="noStrike">
-              <a:solidFill>
-                <a:srgbClr val="000000"/>
-              </a:solidFill>
-              <a:effectLst/>
-              <a:uFillTx/>
-              <a:latin typeface="Arial"/>
-            </a:endParaRPr>
-          </a:p>
-        </p:txBody>
-      </p:sp>
-      <p:sp>
-        <p:nvSpPr>
-          <p:cNvPr id="400" name="TextBox 7"/>
-          <p:cNvSpPr/>
-          <p:nvPr/>
-        </p:nvSpPr>
-        <p:spPr>
-          <a:xfrm>
-            <a:off x="11094480" y="6473880"/>
-            <a:ext cx="547920" cy="167760"/>
-          </a:xfrm>
-          <a:prstGeom prst="rect">
-            <a:avLst/>
-          </a:prstGeom>
-          <a:noFill/>
-          <a:ln w="0">
-            <a:noFill/>
-          </a:ln>
-        </p:spPr>
-        <p:style>
-          <a:lnRef idx="0"/>
-          <a:fillRef idx="0"/>
-          <a:effectRef idx="0"/>
-          <a:fontRef idx="minor"/>
-        </p:style>
-        <p:txBody>
-          <a:bodyPr lIns="0" tIns="0" rIns="0" bIns="0" anchor="t">
-            <a:spAutoFit/>
-          </a:bodyPr>
-          <a:p>
-            <a:pPr algn="r" defTabSz="457200">
-              <a:lnSpc>
-                <a:spcPct val="122000"/>
-              </a:lnSpc>
-            </a:pPr>
-            <a:r>
-              <a:rPr lang="en-US" sz="900" b="0" u="none" strike="noStrike">
-                <a:solidFill>
-                  <a:srgbClr val="D7E5D2"/>
-                </a:solidFill>
-                <a:effectLst/>
-                <a:uFillTx/>
-                <a:latin typeface="Calibri"/>
-                <a:ea typeface="DejaVu Sans"/>
-              </a:rPr>
-              <a:t>12</a:t>
-            </a:r>
-            <a:endParaRPr lang="en-US" sz="900" b="0" u="none" strike="noStrike">
-              <a:solidFill>
-                <a:srgbClr val="000000"/>
-              </a:solidFill>
-              <a:effectLst/>
-              <a:uFillTx/>
-              <a:latin typeface="Arial"/>
-            </a:endParaRPr>
-          </a:p>
-        </p:txBody>
-      </p:sp>
-      <p:sp>
-        <p:nvSpPr>
-          <p:cNvPr id="401" name="Rectangle 13"/>
-          <p:cNvSpPr/>
-          <p:nvPr/>
-        </p:nvSpPr>
-        <p:spPr>
-          <a:xfrm>
-            <a:off x="360" y="360"/>
-            <a:ext cx="12191040" cy="6857280"/>
-          </a:xfrm>
-          <a:prstGeom prst="rect">
-            <a:avLst/>
-          </a:prstGeom>
-          <a:solidFill>
-            <a:schemeClr val="accent1"/>
-          </a:solidFill>
-          <a:ln w="9360">
-            <a:noFill/>
-          </a:ln>
-          <a:effectLst>
-            <a:outerShdw blurRad="39960" dir="5400000" dist="23040" rotWithShape="0">
-              <a:srgbClr val="000000">
-                <a:alpha val="35000"/>
-              </a:srgbClr>
-            </a:outerShdw>
-          </a:effectLst>
-        </p:spPr>
-        <p:style>
-          <a:lnRef idx="0"/>
-          <a:fillRef idx="0"/>
-          <a:effectRef idx="0"/>
-          <a:fontRef idx="minor"/>
-        </p:style>
-        <p:txBody>
-          <a:bodyPr lIns="90000" tIns="45000" rIns="90000" bIns="45000" anchor="ctr">
-            <a:noAutofit/>
-          </a:bodyPr>
-          <a:p>
-            <a:pPr/>
-            <a:endParaRPr lang="en-US" sz="1800" b="0" u="none" strike="noStrike">
-              <a:solidFill>
-                <a:schemeClr val="lt1"/>
-              </a:solidFill>
-              <a:effectLst/>
-              <a:uFillTx/>
-              <a:latin typeface="Calibri"/>
-            </a:endParaRPr>
-          </a:p>
-        </p:txBody>
-      </p:sp>
-      <p:sp>
-        <p:nvSpPr>
-          <p:cNvPr id="402" name="TextBox 1"/>
-          <p:cNvSpPr/>
-          <p:nvPr/>
-        </p:nvSpPr>
-        <p:spPr>
-          <a:xfrm>
-            <a:off x="549000" y="1600560"/>
-            <a:ext cx="11090880" cy="1645200"/>
-          </a:xfrm>
-          <a:prstGeom prst="rect">
-            <a:avLst/>
-          </a:prstGeom>
-          <a:noFill/>
-          <a:ln w="0">
-            <a:noFill/>
-          </a:ln>
-        </p:spPr>
-        <p:style>
-          <a:lnRef idx="0"/>
-          <a:fillRef idx="0"/>
-          <a:effectRef idx="0"/>
-          <a:fontRef idx="minor"/>
-        </p:style>
-        <p:txBody>
-          <a:bodyPr lIns="0" tIns="0" rIns="0" bIns="0" anchor="t">
-            <a:spAutoFit/>
-          </a:bodyPr>
-          <a:p>
-            <a:pPr/>
-            <a:endParaRPr lang="en-US" sz="1800" b="0" u="none" strike="noStrike">
-              <a:solidFill>
-                <a:srgbClr val="000000"/>
-              </a:solidFill>
-              <a:effectLst/>
-              <a:uFillTx/>
-              <a:latin typeface="Arial"/>
-            </a:endParaRPr>
-          </a:p>
-        </p:txBody>
-      </p:sp>
-      <p:sp>
-        <p:nvSpPr>
-          <p:cNvPr id="403" name="TextBox 8"/>
-          <p:cNvSpPr/>
-          <p:nvPr/>
-        </p:nvSpPr>
-        <p:spPr>
-          <a:xfrm>
-            <a:off x="549000" y="2972160"/>
-            <a:ext cx="11090880" cy="743400"/>
-          </a:xfrm>
-          <a:prstGeom prst="rect">
-            <a:avLst/>
-          </a:prstGeom>
-          <a:noFill/>
-          <a:ln w="0">
-            <a:noFill/>
-          </a:ln>
-        </p:spPr>
-        <p:style>
-          <a:lnRef idx="0"/>
-          <a:fillRef idx="0"/>
-          <a:effectRef idx="0"/>
-          <a:fontRef idx="minor"/>
-        </p:style>
-        <p:txBody>
-          <a:bodyPr lIns="0" tIns="0" rIns="0" bIns="0" anchor="t">
-            <a:spAutoFit/>
-          </a:bodyPr>
-          <a:p>
-            <a:pPr defTabSz="457200">
-              <a:lnSpc>
-                <a:spcPct val="122000"/>
-              </a:lnSpc>
-            </a:pPr>
-            <a:r>
-              <a:rPr lang="en-US" sz="4000" b="1" u="none" strike="noStrike">
-                <a:solidFill>
-                  <a:srgbClr val="E8A33D"/>
-                </a:solidFill>
-                <a:effectLst/>
-                <a:uFillTx/>
-                <a:latin typeface="Calibri"/>
-                <a:ea typeface="DejaVu Sans"/>
-              </a:rPr>
-              <a:t>2η ΕΝΟΤΗΤΑ</a:t>
-            </a:r>
-            <a:endParaRPr lang="en-US" sz="4000" b="0" u="none" strike="noStrike">
-              <a:solidFill>
-                <a:srgbClr val="000000"/>
-              </a:solidFill>
-              <a:effectLst/>
-              <a:uFillTx/>
-              <a:latin typeface="Arial"/>
-            </a:endParaRPr>
-          </a:p>
-        </p:txBody>
-      </p:sp>
-      <p:sp>
-        <p:nvSpPr>
-          <p:cNvPr id="404" name="TextBox 9"/>
-          <p:cNvSpPr/>
-          <p:nvPr/>
-        </p:nvSpPr>
-        <p:spPr>
-          <a:xfrm>
-            <a:off x="549000" y="3804120"/>
-            <a:ext cx="11090880" cy="817560"/>
-          </a:xfrm>
-          <a:prstGeom prst="rect">
-            <a:avLst/>
-          </a:prstGeom>
-          <a:noFill/>
-          <a:ln w="0">
-            <a:noFill/>
-          </a:ln>
-        </p:spPr>
-        <p:style>
-          <a:lnRef idx="0"/>
-          <a:fillRef idx="0"/>
-          <a:effectRef idx="0"/>
-          <a:fontRef idx="minor"/>
-        </p:style>
-        <p:txBody>
-          <a:bodyPr lIns="0" tIns="0" rIns="0" bIns="0" anchor="t">
-            <a:spAutoFit/>
-          </a:bodyPr>
-          <a:p>
-            <a:pPr defTabSz="457200">
-              <a:lnSpc>
-                <a:spcPct val="122000"/>
-              </a:lnSpc>
-            </a:pPr>
-            <a:r>
-              <a:rPr lang="en-US" sz="4400" b="1" u="none" strike="noStrike">
-                <a:solidFill>
-                  <a:srgbClr val="FFFFFF"/>
-                </a:solidFill>
-                <a:effectLst/>
-                <a:uFillTx/>
-                <a:latin typeface="Cambria"/>
-                <a:ea typeface="DejaVu Sans"/>
-              </a:rPr>
-              <a:t>Το </a:t>
-            </a:r>
-            <a:r>
-              <a:rPr lang="en-US" sz="4400" b="1" u="none" strike="noStrike">
-                <a:solidFill>
-                  <a:srgbClr val="FFFFFF"/>
-                </a:solidFill>
-                <a:effectLst/>
-                <a:uFillTx/>
-                <a:latin typeface="Cambria"/>
-                <a:ea typeface="DejaVu Sans"/>
-              </a:rPr>
-              <a:t>σύστ</a:t>
-            </a:r>
-            <a:r>
-              <a:rPr lang="en-US" sz="4400" b="1" u="none" strike="noStrike">
-                <a:solidFill>
-                  <a:srgbClr val="FFFFFF"/>
-                </a:solidFill>
-                <a:effectLst/>
-                <a:uFillTx/>
-                <a:latin typeface="Cambria"/>
-                <a:ea typeface="DejaVu Sans"/>
-              </a:rPr>
-              <a:t>ημα</a:t>
-            </a:r>
-            <a:endParaRPr lang="en-US" sz="4400" b="0" u="none" strike="noStrike">
-              <a:solidFill>
-                <a:srgbClr val="000000"/>
-              </a:solidFill>
-              <a:effectLst/>
-              <a:uFillTx/>
-              <a:latin typeface="Arial"/>
-            </a:endParaRPr>
-          </a:p>
-        </p:txBody>
-      </p:sp>
-      <p:sp>
-        <p:nvSpPr>
-          <p:cNvPr id="405" name="TextBox 10"/>
-          <p:cNvSpPr/>
-          <p:nvPr/>
-        </p:nvSpPr>
-        <p:spPr>
-          <a:xfrm>
-            <a:off x="549000" y="4645440"/>
-            <a:ext cx="11090880" cy="365040"/>
-          </a:xfrm>
-          <a:prstGeom prst="rect">
-            <a:avLst/>
-          </a:prstGeom>
-          <a:noFill/>
-          <a:ln w="0">
-            <a:noFill/>
-          </a:ln>
-        </p:spPr>
-        <p:style>
-          <a:lnRef idx="0"/>
-          <a:fillRef idx="0"/>
-          <a:effectRef idx="0"/>
-          <a:fontRef idx="minor"/>
-        </p:style>
-        <p:txBody>
-          <a:bodyPr lIns="0" tIns="0" rIns="0" bIns="0" anchor="t">
-            <a:spAutoFit/>
-          </a:bodyPr>
-          <a:p>
-            <a:pPr/>
-            <a:endParaRPr lang="en-US" sz="1800" b="0" u="none" strike="noStrike">
-              <a:solidFill>
-                <a:srgbClr val="000000"/>
-              </a:solidFill>
-              <a:effectLst/>
-              <a:uFillTx/>
-              <a:latin typeface="Arial"/>
-            </a:endParaRPr>
-          </a:p>
-        </p:txBody>
-      </p:sp>
-      <p:sp>
-        <p:nvSpPr>
-          <p:cNvPr id="406" name="TextBox 11"/>
-          <p:cNvSpPr/>
-          <p:nvPr/>
-        </p:nvSpPr>
-        <p:spPr>
-          <a:xfrm>
-            <a:off x="549000" y="6474240"/>
-            <a:ext cx="5485680" cy="273600"/>
-          </a:xfrm>
-          <a:prstGeom prst="rect">
-            <a:avLst/>
-          </a:prstGeom>
-          <a:noFill/>
-          <a:ln w="0">
-            <a:noFill/>
-          </a:ln>
-        </p:spPr>
-        <p:style>
-          <a:lnRef idx="0"/>
-          <a:fillRef idx="0"/>
-          <a:effectRef idx="0"/>
-          <a:fontRef idx="minor"/>
-        </p:style>
-        <p:txBody>
-          <a:bodyPr lIns="0" tIns="0" rIns="0" bIns="0" anchor="t">
-            <a:spAutoFit/>
-          </a:bodyPr>
-          <a:p>
-            <a:pPr/>
-            <a:endParaRPr lang="en-US" sz="1800" b="0" u="none" strike="noStrike">
-              <a:solidFill>
-                <a:srgbClr val="000000"/>
-              </a:solidFill>
-              <a:effectLst/>
-              <a:uFillTx/>
-              <a:latin typeface="Arial"/>
-            </a:endParaRPr>
-          </a:p>
-        </p:txBody>
-      </p:sp>
-      <p:sp>
-        <p:nvSpPr>
-          <p:cNvPr id="407" name="TextBox 12"/>
-          <p:cNvSpPr/>
-          <p:nvPr/>
-        </p:nvSpPr>
-        <p:spPr>
-          <a:xfrm>
-            <a:off x="11094840" y="6474240"/>
-            <a:ext cx="547920" cy="167760"/>
-          </a:xfrm>
-          <a:prstGeom prst="rect">
-            <a:avLst/>
-          </a:prstGeom>
-          <a:noFill/>
-          <a:ln w="0">
-            <a:noFill/>
-          </a:ln>
-        </p:spPr>
-        <p:style>
-          <a:lnRef idx="0"/>
-          <a:fillRef idx="0"/>
-          <a:effectRef idx="0"/>
-          <a:fontRef idx="minor"/>
-        </p:style>
-        <p:txBody>
-          <a:bodyPr lIns="0" tIns="0" rIns="0" bIns="0" anchor="t">
-            <a:spAutoFit/>
-          </a:bodyPr>
-          <a:p>
-            <a:pPr algn="r" defTabSz="457200">
-              <a:lnSpc>
-                <a:spcPct val="122000"/>
-              </a:lnSpc>
-            </a:pPr>
-            <a:r>
-              <a:rPr lang="en-US" sz="900" b="0" u="none" strike="noStrike">
-                <a:solidFill>
-                  <a:srgbClr val="D7E5D2"/>
-                </a:solidFill>
-                <a:effectLst/>
-                <a:uFillTx/>
-                <a:latin typeface="Calibri"/>
-                <a:ea typeface="DejaVu Sans"/>
-              </a:rPr>
-              <a:t>7</a:t>
-            </a:r>
-            <a:endParaRPr lang="en-US" sz="900" b="0" u="none" strike="noStrike">
-              <a:solidFill>
-                <a:srgbClr val="000000"/>
-              </a:solidFill>
-              <a:effectLst/>
-              <a:uFillTx/>
-              <a:latin typeface="Arial"/>
-            </a:endParaRPr>
-          </a:p>
-        </p:txBody>
-      </p:sp>
-      <p:sp>
-        <p:nvSpPr>
-          <p:cNvPr id="408" name="Rectangle 14"/>
-          <p:cNvSpPr/>
-          <p:nvPr/>
-        </p:nvSpPr>
-        <p:spPr>
-          <a:xfrm>
-            <a:off x="720" y="720"/>
-            <a:ext cx="12191040" cy="6857280"/>
-          </a:xfrm>
-          <a:prstGeom prst="rect">
-            <a:avLst/>
-          </a:prstGeom>
-          <a:solidFill>
-            <a:srgbClr val="28471F"/>
-          </a:solidFill>
-          <a:ln w="9360">
-            <a:noFill/>
-          </a:ln>
-          <a:effectLst>
-            <a:outerShdw blurRad="39960" dir="5400000" dist="23040" rotWithShape="0">
-              <a:srgbClr val="000000">
-                <a:alpha val="35000"/>
-              </a:srgbClr>
-            </a:outerShdw>
-          </a:effectLst>
-        </p:spPr>
-        <p:style>
-          <a:lnRef idx="0"/>
-          <a:fillRef idx="0"/>
-          <a:effectRef idx="0"/>
-          <a:fontRef idx="minor"/>
-        </p:style>
-        <p:txBody>
-          <a:bodyPr lIns="90000" tIns="45000" rIns="90000" bIns="45000" anchor="ctr">
-            <a:noAutofit/>
-          </a:bodyPr>
-          <a:p>
-            <a:pPr/>
-            <a:endParaRPr lang="en-US" sz="1800" b="0" u="none" strike="noStrike">
-              <a:solidFill>
-                <a:schemeClr val="lt1"/>
-              </a:solidFill>
-              <a:effectLst/>
-              <a:uFillTx/>
-              <a:latin typeface="Calibri"/>
-            </a:endParaRPr>
-          </a:p>
-        </p:txBody>
-      </p:sp>
-      <p:sp>
-        <p:nvSpPr>
-          <p:cNvPr id="409" name="TextBox 13"/>
-          <p:cNvSpPr/>
-          <p:nvPr/>
-        </p:nvSpPr>
-        <p:spPr>
-          <a:xfrm>
-            <a:off x="549360" y="1600920"/>
-            <a:ext cx="11090880" cy="1784160"/>
-          </a:xfrm>
-          <a:prstGeom prst="rect">
-            <a:avLst/>
-          </a:prstGeom>
-          <a:noFill/>
-          <a:ln w="0">
-            <a:noFill/>
-          </a:ln>
-        </p:spPr>
-        <p:style>
-          <a:lnRef idx="0"/>
-          <a:fillRef idx="0"/>
-          <a:effectRef idx="0"/>
-          <a:fontRef idx="minor"/>
-        </p:style>
-        <p:txBody>
-          <a:bodyPr lIns="0" tIns="0" rIns="0" bIns="0" anchor="t">
-            <a:spAutoFit/>
-          </a:bodyPr>
-          <a:p>
-            <a:pPr/>
-            <a:endParaRPr lang="en-US" sz="1800" b="0" u="none" strike="noStrike">
-              <a:solidFill>
-                <a:srgbClr val="000000"/>
-              </a:solidFill>
-              <a:effectLst/>
-              <a:uFillTx/>
-              <a:latin typeface="Arial"/>
-            </a:endParaRPr>
-          </a:p>
-        </p:txBody>
-      </p:sp>
-      <p:sp>
-        <p:nvSpPr>
-          <p:cNvPr id="410" name="TextBox 14"/>
-          <p:cNvSpPr/>
-          <p:nvPr/>
-        </p:nvSpPr>
-        <p:spPr>
-          <a:xfrm>
-            <a:off x="549360" y="2972520"/>
-            <a:ext cx="11090880" cy="743400"/>
-          </a:xfrm>
-          <a:prstGeom prst="rect">
-            <a:avLst/>
-          </a:prstGeom>
-          <a:noFill/>
-          <a:ln w="0">
-            <a:noFill/>
-          </a:ln>
-        </p:spPr>
-        <p:style>
-          <a:lnRef idx="0"/>
-          <a:fillRef idx="0"/>
-          <a:effectRef idx="0"/>
-          <a:fontRef idx="minor"/>
-        </p:style>
-        <p:txBody>
-          <a:bodyPr lIns="0" tIns="0" rIns="0" bIns="0" anchor="t">
-            <a:spAutoFit/>
-          </a:bodyPr>
-          <a:p>
-            <a:pPr defTabSz="457200">
-              <a:lnSpc>
-                <a:spcPct val="122000"/>
-              </a:lnSpc>
-            </a:pPr>
-            <a:r>
-              <a:rPr lang="en-US" sz="4000" b="1" u="none" strike="noStrike">
-                <a:solidFill>
-                  <a:srgbClr val="E8A33D"/>
-                </a:solidFill>
-                <a:effectLst/>
-                <a:uFillTx/>
-                <a:latin typeface="Calibri"/>
-                <a:ea typeface="DejaVu Sans"/>
-              </a:rPr>
-              <a:t>4η ΕΝΟΤΗΤΑ</a:t>
-            </a:r>
-            <a:endParaRPr lang="en-US" sz="4000" b="0" u="none" strike="noStrike">
-              <a:solidFill>
-                <a:srgbClr val="000000"/>
-              </a:solidFill>
-              <a:effectLst/>
-              <a:uFillTx/>
-              <a:latin typeface="Arial"/>
-            </a:endParaRPr>
-          </a:p>
-        </p:txBody>
-      </p:sp>
-      <p:sp>
-        <p:nvSpPr>
-          <p:cNvPr id="411" name="TextBox 15"/>
-          <p:cNvSpPr/>
-          <p:nvPr/>
-        </p:nvSpPr>
-        <p:spPr>
-          <a:xfrm>
-            <a:off x="549360" y="3804480"/>
-            <a:ext cx="11090880" cy="817560"/>
-          </a:xfrm>
-          <a:prstGeom prst="rect">
-            <a:avLst/>
-          </a:prstGeom>
-          <a:noFill/>
-          <a:ln w="0">
-            <a:noFill/>
-          </a:ln>
-        </p:spPr>
-        <p:style>
-          <a:lnRef idx="0"/>
-          <a:fillRef idx="0"/>
-          <a:effectRef idx="0"/>
-          <a:fontRef idx="minor"/>
-        </p:style>
-        <p:txBody>
-          <a:bodyPr lIns="0" tIns="0" rIns="0" bIns="0" anchor="t">
-            <a:spAutoFit/>
-          </a:bodyPr>
-          <a:p>
-            <a:pPr defTabSz="457200">
-              <a:lnSpc>
-                <a:spcPct val="122000"/>
-              </a:lnSpc>
-            </a:pPr>
-            <a:r>
-              <a:rPr lang="en-US" sz="4400" b="1" u="none" strike="noStrike">
-                <a:solidFill>
-                  <a:srgbClr val="FFFFFF"/>
-                </a:solidFill>
-                <a:effectLst/>
-                <a:uFillTx/>
-                <a:latin typeface="Cambria"/>
-                <a:ea typeface="DejaVu Sans"/>
-              </a:rPr>
-              <a:t>Σ</a:t>
-            </a:r>
-            <a:r>
-              <a:rPr lang="en-US" sz="4400" b="1" u="none" strike="noStrike">
-                <a:solidFill>
-                  <a:srgbClr val="FFFFFF"/>
-                </a:solidFill>
-                <a:effectLst/>
-                <a:uFillTx/>
-                <a:latin typeface="Cambria"/>
-                <a:ea typeface="DejaVu Sans"/>
-              </a:rPr>
-              <a:t>υ</a:t>
-            </a:r>
-            <a:r>
-              <a:rPr lang="en-US" sz="4400" b="1" u="none" strike="noStrike">
-                <a:solidFill>
-                  <a:srgbClr val="FFFFFF"/>
-                </a:solidFill>
-                <a:effectLst/>
-                <a:uFillTx/>
-                <a:latin typeface="Cambria"/>
-                <a:ea typeface="DejaVu Sans"/>
-              </a:rPr>
-              <a:t>μ</a:t>
-            </a:r>
-            <a:r>
-              <a:rPr lang="en-US" sz="4400" b="1" u="none" strike="noStrike">
-                <a:solidFill>
-                  <a:srgbClr val="FFFFFF"/>
-                </a:solidFill>
-                <a:effectLst/>
-                <a:uFillTx/>
-                <a:latin typeface="Cambria"/>
-                <a:ea typeface="DejaVu Sans"/>
-              </a:rPr>
-              <a:t>π</a:t>
-            </a:r>
-            <a:r>
-              <a:rPr lang="en-US" sz="4400" b="1" u="none" strike="noStrike">
-                <a:solidFill>
-                  <a:srgbClr val="FFFFFF"/>
-                </a:solidFill>
-                <a:effectLst/>
-                <a:uFillTx/>
-                <a:latin typeface="Cambria"/>
-                <a:ea typeface="DejaVu Sans"/>
-              </a:rPr>
-              <a:t>ε</a:t>
-            </a:r>
-            <a:r>
-              <a:rPr lang="en-US" sz="4400" b="1" u="none" strike="noStrike">
-                <a:solidFill>
-                  <a:srgbClr val="FFFFFF"/>
-                </a:solidFill>
-                <a:effectLst/>
-                <a:uFillTx/>
-                <a:latin typeface="Cambria"/>
-                <a:ea typeface="DejaVu Sans"/>
-              </a:rPr>
-              <a:t>ρ</a:t>
-            </a:r>
-            <a:r>
-              <a:rPr lang="en-US" sz="4400" b="1" u="none" strike="noStrike">
-                <a:solidFill>
-                  <a:srgbClr val="FFFFFF"/>
-                </a:solidFill>
-                <a:effectLst/>
-                <a:uFillTx/>
-                <a:latin typeface="Cambria"/>
-                <a:ea typeface="DejaVu Sans"/>
-              </a:rPr>
-              <a:t>ά</a:t>
-            </a:r>
-            <a:r>
-              <a:rPr lang="en-US" sz="4400" b="1" u="none" strike="noStrike">
-                <a:solidFill>
-                  <a:srgbClr val="FFFFFF"/>
-                </a:solidFill>
-                <a:effectLst/>
-                <a:uFillTx/>
-                <a:latin typeface="Cambria"/>
-                <a:ea typeface="DejaVu Sans"/>
-              </a:rPr>
-              <a:t>σ</a:t>
-            </a:r>
-            <a:r>
-              <a:rPr lang="en-US" sz="4400" b="1" u="none" strike="noStrike">
-                <a:solidFill>
-                  <a:srgbClr val="FFFFFF"/>
-                </a:solidFill>
-                <a:effectLst/>
-                <a:uFillTx/>
-                <a:latin typeface="Cambria"/>
-                <a:ea typeface="DejaVu Sans"/>
-              </a:rPr>
-              <a:t>μ</a:t>
-            </a:r>
-            <a:r>
-              <a:rPr lang="en-US" sz="4400" b="1" u="none" strike="noStrike">
-                <a:solidFill>
-                  <a:srgbClr val="FFFFFF"/>
-                </a:solidFill>
-                <a:effectLst/>
-                <a:uFillTx/>
-                <a:latin typeface="Cambria"/>
-                <a:ea typeface="DejaVu Sans"/>
-              </a:rPr>
-              <a:t>α</a:t>
-            </a:r>
-            <a:r>
-              <a:rPr lang="en-US" sz="4400" b="1" u="none" strike="noStrike">
-                <a:solidFill>
-                  <a:srgbClr val="FFFFFF"/>
-                </a:solidFill>
-                <a:effectLst/>
-                <a:uFillTx/>
-                <a:latin typeface="Cambria"/>
-                <a:ea typeface="DejaVu Sans"/>
-              </a:rPr>
-              <a:t>τ</a:t>
-            </a:r>
-            <a:r>
-              <a:rPr lang="en-US" sz="4400" b="1" u="none" strike="noStrike">
-                <a:solidFill>
-                  <a:srgbClr val="FFFFFF"/>
-                </a:solidFill>
-                <a:effectLst/>
-                <a:uFillTx/>
-                <a:latin typeface="Cambria"/>
-                <a:ea typeface="DejaVu Sans"/>
-              </a:rPr>
-              <a:t>α</a:t>
-            </a:r>
-            <a:endParaRPr lang="en-US" sz="4400" b="0" u="none" strike="noStrike">
-              <a:solidFill>
-                <a:srgbClr val="000000"/>
-              </a:solidFill>
-              <a:effectLst/>
-              <a:uFillTx/>
-              <a:latin typeface="Arial"/>
-            </a:endParaRPr>
-          </a:p>
-        </p:txBody>
-      </p:sp>
-      <p:sp>
-        <p:nvSpPr>
-          <p:cNvPr id="412" name="TextBox 16"/>
-          <p:cNvSpPr/>
-          <p:nvPr/>
-        </p:nvSpPr>
-        <p:spPr>
-          <a:xfrm>
-            <a:off x="549360" y="4645800"/>
-            <a:ext cx="11090880" cy="278640"/>
-          </a:xfrm>
-          <a:prstGeom prst="rect">
-            <a:avLst/>
-          </a:prstGeom>
-          <a:noFill/>
-          <a:ln w="0">
-            <a:noFill/>
-          </a:ln>
-        </p:spPr>
-        <p:style>
-          <a:lnRef idx="0"/>
-          <a:fillRef idx="0"/>
-          <a:effectRef idx="0"/>
-          <a:fontRef idx="minor"/>
-        </p:style>
-        <p:txBody>
-          <a:bodyPr lIns="0" tIns="0" rIns="0" bIns="0" anchor="t">
-            <a:spAutoFit/>
-          </a:bodyPr>
-          <a:p>
-            <a:pPr/>
-            <a:endParaRPr lang="en-US" sz="1800" b="0" u="none" strike="noStrike">
-              <a:solidFill>
-                <a:srgbClr val="000000"/>
-              </a:solidFill>
-              <a:effectLst/>
-              <a:uFillTx/>
-              <a:latin typeface="Arial"/>
-            </a:endParaRPr>
-          </a:p>
-        </p:txBody>
-      </p:sp>
-      <p:sp>
-        <p:nvSpPr>
-          <p:cNvPr id="413" name="TextBox 17"/>
-          <p:cNvSpPr/>
-          <p:nvPr/>
-        </p:nvSpPr>
-        <p:spPr>
-          <a:xfrm>
-            <a:off x="549360" y="6474600"/>
-            <a:ext cx="5485680" cy="167760"/>
-          </a:xfrm>
-          <a:prstGeom prst="rect">
-            <a:avLst/>
-          </a:prstGeom>
-          <a:noFill/>
-          <a:ln w="0">
-            <a:noFill/>
-          </a:ln>
-        </p:spPr>
-        <p:style>
-          <a:lnRef idx="0"/>
-          <a:fillRef idx="0"/>
-          <a:effectRef idx="0"/>
-          <a:fontRef idx="minor"/>
-        </p:style>
-        <p:txBody>
-          <a:bodyPr lIns="0" tIns="0" rIns="0" bIns="0" anchor="t">
-            <a:spAutoFit/>
-          </a:bodyPr>
-          <a:p>
-            <a:pPr/>
-            <a:endParaRPr lang="en-US" sz="1800" b="0" u="none" strike="noStrike">
-              <a:solidFill>
-                <a:srgbClr val="000000"/>
-              </a:solidFill>
-              <a:effectLst/>
-              <a:uFillTx/>
-              <a:latin typeface="Arial"/>
-            </a:endParaRPr>
-          </a:p>
-        </p:txBody>
-      </p:sp>
-      <p:sp>
-        <p:nvSpPr>
-          <p:cNvPr id="414" name="TextBox 18"/>
-          <p:cNvSpPr/>
-          <p:nvPr/>
-        </p:nvSpPr>
-        <p:spPr>
-          <a:xfrm>
-            <a:off x="11095200" y="6474600"/>
-            <a:ext cx="547920" cy="167760"/>
-          </a:xfrm>
-          <a:prstGeom prst="rect">
-            <a:avLst/>
-          </a:prstGeom>
-          <a:noFill/>
-          <a:ln w="0">
-            <a:noFill/>
-          </a:ln>
-        </p:spPr>
-        <p:style>
-          <a:lnRef idx="0"/>
-          <a:fillRef idx="0"/>
-          <a:effectRef idx="0"/>
-          <a:fontRef idx="minor"/>
-        </p:style>
-        <p:txBody>
-          <a:bodyPr lIns="0" tIns="0" rIns="0" bIns="0" anchor="t">
-            <a:spAutoFit/>
-          </a:bodyPr>
-          <a:p>
-            <a:pPr algn="r" defTabSz="457200">
-              <a:lnSpc>
-                <a:spcPct val="122000"/>
-              </a:lnSpc>
-            </a:pPr>
-            <a:r>
-              <a:rPr lang="en-US" sz="900" b="0" u="none" strike="noStrike">
-                <a:solidFill>
-                  <a:srgbClr val="D7E5D2"/>
-                </a:solidFill>
-                <a:effectLst/>
-                <a:uFillTx/>
-                <a:latin typeface="Calibri"/>
-                <a:ea typeface="DejaVu Sans"/>
-              </a:rPr>
-              <a:t>3</a:t>
-            </a:r>
-            <a:endParaRPr lang="en-US" sz="900" b="0" u="none" strike="noStrike">
-              <a:solidFill>
-                <a:srgbClr val="000000"/>
-              </a:solidFill>
-              <a:effectLst/>
-              <a:uFillTx/>
-              <a:latin typeface="Arial"/>
-            </a:endParaRPr>
-          </a:p>
-        </p:txBody>
-      </p:sp>
     </p:spTree>
   </p:cSld>
   <mc:AlternateContent>
@@ -34157,14 +31772,14 @@
       </p:sp>
       <p:sp>
         <p:nvSpPr>
-          <p:cNvPr id="426" name="TextBox 5"/>
+          <p:cNvPr id="427" name="TextBox 7"/>
           <p:cNvSpPr/>
           <p:nvPr/>
         </p:nvSpPr>
         <p:spPr>
           <a:xfrm>
-            <a:off x="960120" y="4709160"/>
-            <a:ext cx="11090880" cy="631800"/>
+            <a:off x="11094480" y="6473880"/>
+            <a:ext cx="547920" cy="167760"/>
           </a:xfrm>
           <a:prstGeom prst="rect">
             <a:avLst/>
@@ -34185,77 +31800,9 @@
             <a:spAutoFit/>
           </a:bodyPr>
           <a:p>
-            <a:pPr defTabSz="457200">
-              <a:lnSpc>
-                <a:spcPct val="122000"/>
-              </a:lnSpc>
-            </a:pPr>
-            <a:endParaRPr lang="en-US" sz="1800" b="0" u="none" strike="noStrike">
-              <a:solidFill>
-                <a:srgbClr val="000000"/>
-              </a:solidFill>
-              <a:effectLst/>
-              <a:uFillTx/>
-              <a:latin typeface="Arial"/>
-            </a:endParaRPr>
-          </a:p>
-        </p:txBody>
-      </p:sp>
-      <p:sp>
-        <p:nvSpPr>
-          <p:cNvPr id="427" name="TextBox 7"/>
-          <p:cNvSpPr/>
-          <p:nvPr/>
-        </p:nvSpPr>
-        <p:spPr>
-          <a:xfrm>
-            <a:off x="11094480" y="6473880"/>
-            <a:ext cx="547920" cy="167760"/>
-          </a:xfrm>
-          <a:prstGeom prst="rect">
-            <a:avLst/>
-          </a:prstGeom>
-          <a:noFill/>
-          <a:ln w="0">
-            <a:noFill/>
-          </a:ln>
-        </p:spPr>
-        <p:style>
-          <a:lnRef idx="0"/>
-          <a:fillRef idx="0"/>
-          <a:effectRef idx="0"/>
-          <a:fontRef idx="minor"/>
-        </p:style>
-        <p:txBody>
-          <a:bodyPr lIns="0" tIns="0" rIns="0" bIns="0" anchor="t">
-            <a:spAutoFit/>
-          </a:bodyPr>
-          <a:p>
-            <a:pPr algn="r" defTabSz="457200">
-              <a:lnSpc>
-                <a:spcPct val="122000"/>
-              </a:lnSpc>
-            </a:pPr>
-            <a:r>
-              <a:rPr lang="en-US" sz="900" b="0" u="none" strike="noStrike">
-                <a:solidFill>
-                  <a:srgbClr val="D7E5D2"/>
-                </a:solidFill>
-                <a:effectLst/>
-                <a:uFillTx/>
-                <a:latin typeface="Calibri"/>
-                <a:ea typeface="DejaVu Sans"/>
-              </a:rPr>
-              <a:t>27</a:t>
-            </a:r>
-            <a:endParaRPr lang="en-US" sz="900" b="0" u="none" strike="noStrike">
-              <a:solidFill>
-                <a:srgbClr val="000000"/>
-              </a:solidFill>
-              <a:effectLst/>
-              <a:uFillTx/>
-              <a:latin typeface="Arial"/>
-            </a:endParaRPr>
+            <a:r>
+              <a:t>26</a:t>
+            </a:r>
           </a:p>
         </p:txBody>
       </p:sp>
@@ -38029,381 +35576,6 @@
                 <a:ea typeface="DejaVu Sans"/>
               </a:rPr>
               <a:t>7</a:t>
-            </a:r>
-            <a:endParaRPr lang="en-US" sz="900" b="0" u="none" strike="noStrike">
-              <a:solidFill>
-                <a:srgbClr val="000000"/>
-              </a:solidFill>
-              <a:effectLst/>
-              <a:uFillTx/>
-              <a:latin typeface="Arial"/>
-            </a:endParaRPr>
-          </a:p>
-        </p:txBody>
-      </p:sp>
-      <p:sp>
-        <p:nvSpPr>
-          <p:cNvPr id="111" name="Rectangle 3"/>
-          <p:cNvSpPr/>
-          <p:nvPr/>
-        </p:nvSpPr>
-        <p:spPr>
-          <a:xfrm>
-            <a:off x="360" y="360"/>
-            <a:ext cx="12191040" cy="6857280"/>
-          </a:xfrm>
-          <a:prstGeom prst="rect">
-            <a:avLst/>
-          </a:prstGeom>
-          <a:solidFill>
-            <a:srgbClr val="28471F"/>
-          </a:solidFill>
-          <a:ln w="9360">
-            <a:noFill/>
-          </a:ln>
-          <a:effectLst>
-            <a:outerShdw blurRad="39960" dir="5400000" dist="23040" rotWithShape="0">
-              <a:srgbClr val="000000">
-                <a:alpha val="35000"/>
-              </a:srgbClr>
-            </a:outerShdw>
-          </a:effectLst>
-        </p:spPr>
-        <p:style>
-          <a:lnRef idx="0"/>
-          <a:fillRef idx="0"/>
-          <a:effectRef idx="0"/>
-          <a:fontRef idx="minor"/>
-        </p:style>
-        <p:txBody>
-          <a:bodyPr lIns="90000" tIns="45000" rIns="90000" bIns="45000" anchor="ctr">
-            <a:noAutofit/>
-          </a:bodyPr>
-          <a:p>
-            <a:pPr/>
-            <a:endParaRPr lang="en-US" sz="1800" b="0" u="none" strike="noStrike">
-              <a:solidFill>
-                <a:schemeClr val="lt1"/>
-              </a:solidFill>
-              <a:effectLst/>
-              <a:uFillTx/>
-              <a:latin typeface="Calibri"/>
-            </a:endParaRPr>
-          </a:p>
-        </p:txBody>
-      </p:sp>
-      <p:sp>
-        <p:nvSpPr>
-          <p:cNvPr id="112" name="TextBox 2"/>
-          <p:cNvSpPr/>
-          <p:nvPr/>
-        </p:nvSpPr>
-        <p:spPr>
-          <a:xfrm>
-            <a:off x="549000" y="1600560"/>
-            <a:ext cx="11090880" cy="1784160"/>
-          </a:xfrm>
-          <a:prstGeom prst="rect">
-            <a:avLst/>
-          </a:prstGeom>
-          <a:noFill/>
-          <a:ln w="0">
-            <a:noFill/>
-          </a:ln>
-        </p:spPr>
-        <p:style>
-          <a:lnRef idx="0"/>
-          <a:fillRef idx="0"/>
-          <a:effectRef idx="0"/>
-          <a:fontRef idx="minor"/>
-        </p:style>
-        <p:txBody>
-          <a:bodyPr lIns="0" tIns="0" rIns="0" bIns="0" anchor="t">
-            <a:spAutoFit/>
-          </a:bodyPr>
-          <a:p>
-            <a:pPr/>
-            <a:endParaRPr lang="en-US" sz="1800" b="0" u="none" strike="noStrike">
-              <a:solidFill>
-                <a:srgbClr val="000000"/>
-              </a:solidFill>
-              <a:effectLst/>
-              <a:uFillTx/>
-              <a:latin typeface="Arial"/>
-            </a:endParaRPr>
-          </a:p>
-        </p:txBody>
-      </p:sp>
-      <p:sp>
-        <p:nvSpPr>
-          <p:cNvPr id="113" name="TextBox 3"/>
-          <p:cNvSpPr/>
-          <p:nvPr/>
-        </p:nvSpPr>
-        <p:spPr>
-          <a:xfrm>
-            <a:off x="549000" y="2972160"/>
-            <a:ext cx="11090880" cy="743400"/>
-          </a:xfrm>
-          <a:prstGeom prst="rect">
-            <a:avLst/>
-          </a:prstGeom>
-          <a:noFill/>
-          <a:ln w="0">
-            <a:noFill/>
-          </a:ln>
-        </p:spPr>
-        <p:style>
-          <a:lnRef idx="0"/>
-          <a:fillRef idx="0"/>
-          <a:effectRef idx="0"/>
-          <a:fontRef idx="minor"/>
-        </p:style>
-        <p:txBody>
-          <a:bodyPr lIns="0" tIns="0" rIns="0" bIns="0" anchor="t">
-            <a:spAutoFit/>
-          </a:bodyPr>
-          <a:p>
-            <a:pPr defTabSz="457200">
-              <a:lnSpc>
-                <a:spcPct val="122000"/>
-              </a:lnSpc>
-            </a:pPr>
-            <a:r>
-              <a:rPr lang="en-US" sz="4000" b="1" u="none" strike="noStrike">
-                <a:solidFill>
-                  <a:srgbClr val="E8A33D"/>
-                </a:solidFill>
-                <a:effectLst/>
-                <a:uFillTx/>
-                <a:latin typeface="Calibri"/>
-                <a:ea typeface="DejaVu Sans"/>
-              </a:rPr>
-              <a:t>2η ΕΝΟΤΗΤΑ</a:t>
-            </a:r>
-            <a:endParaRPr lang="en-US" sz="4000" b="0" u="none" strike="noStrike">
-              <a:solidFill>
-                <a:srgbClr val="000000"/>
-              </a:solidFill>
-              <a:effectLst/>
-              <a:uFillTx/>
-              <a:latin typeface="Arial"/>
-            </a:endParaRPr>
-          </a:p>
-        </p:txBody>
-      </p:sp>
-      <p:sp>
-        <p:nvSpPr>
-          <p:cNvPr id="114" name="TextBox 4"/>
-          <p:cNvSpPr/>
-          <p:nvPr/>
-        </p:nvSpPr>
-        <p:spPr>
-          <a:xfrm>
-            <a:off x="549000" y="3804120"/>
-            <a:ext cx="11090880" cy="817560"/>
-          </a:xfrm>
-          <a:prstGeom prst="rect">
-            <a:avLst/>
-          </a:prstGeom>
-          <a:noFill/>
-          <a:ln w="0">
-            <a:noFill/>
-          </a:ln>
-        </p:spPr>
-        <p:style>
-          <a:lnRef idx="0"/>
-          <a:fillRef idx="0"/>
-          <a:effectRef idx="0"/>
-          <a:fontRef idx="minor"/>
-        </p:style>
-        <p:txBody>
-          <a:bodyPr lIns="0" tIns="0" rIns="0" bIns="0" anchor="t">
-            <a:spAutoFit/>
-          </a:bodyPr>
-          <a:p>
-            <a:pPr defTabSz="457200">
-              <a:lnSpc>
-                <a:spcPct val="122000"/>
-              </a:lnSpc>
-            </a:pPr>
-            <a:r>
-              <a:rPr lang="en-US" sz="4400" b="1" u="none" strike="noStrike">
-                <a:solidFill>
-                  <a:srgbClr val="FFFFFF"/>
-                </a:solidFill>
-                <a:effectLst/>
-                <a:uFillTx/>
-                <a:latin typeface="Cambria"/>
-                <a:ea typeface="DejaVu Sans"/>
-              </a:rPr>
-              <a:t>Το </a:t>
-            </a:r>
-            <a:r>
-              <a:rPr lang="en-US" sz="4400" b="1" u="none" strike="noStrike">
-                <a:solidFill>
-                  <a:srgbClr val="FFFFFF"/>
-                </a:solidFill>
-                <a:effectLst/>
-                <a:uFillTx/>
-                <a:latin typeface="Cambria"/>
-                <a:ea typeface="DejaVu Sans"/>
-              </a:rPr>
-              <a:t>σύστημ</a:t>
-            </a:r>
-            <a:r>
-              <a:rPr lang="en-US" sz="4400" b="1" u="none" strike="noStrike">
-                <a:solidFill>
-                  <a:srgbClr val="FFFFFF"/>
-                </a:solidFill>
-                <a:effectLst/>
-                <a:uFillTx/>
-                <a:latin typeface="Cambria"/>
-                <a:ea typeface="DejaVu Sans"/>
-              </a:rPr>
-              <a:t>α</a:t>
-            </a:r>
-            <a:endParaRPr lang="en-US" sz="4400" b="0" u="none" strike="noStrike">
-              <a:solidFill>
-                <a:srgbClr val="000000"/>
-              </a:solidFill>
-              <a:effectLst/>
-              <a:uFillTx/>
-              <a:latin typeface="Arial"/>
-            </a:endParaRPr>
-          </a:p>
-        </p:txBody>
-      </p:sp>
-      <p:sp>
-        <p:nvSpPr>
-          <p:cNvPr id="115" name="TextBox 5"/>
-          <p:cNvSpPr/>
-          <p:nvPr/>
-        </p:nvSpPr>
-        <p:spPr>
-          <a:xfrm>
-            <a:off x="549000" y="4645440"/>
-            <a:ext cx="11090880" cy="278640"/>
-          </a:xfrm>
-          <a:prstGeom prst="rect">
-            <a:avLst/>
-          </a:prstGeom>
-          <a:noFill/>
-          <a:ln w="0">
-            <a:noFill/>
-          </a:ln>
-        </p:spPr>
-        <p:style>
-          <a:lnRef idx="0"/>
-          <a:fillRef idx="0"/>
-          <a:effectRef idx="0"/>
-          <a:fontRef idx="minor"/>
-        </p:style>
-        <p:txBody>
-          <a:bodyPr lIns="0" tIns="0" rIns="0" bIns="0" anchor="t">
-            <a:spAutoFit/>
-          </a:bodyPr>
-          <a:p>
-            <a:pPr/>
-            <a:endParaRPr lang="en-US" sz="1800" b="0" u="none" strike="noStrike">
-              <a:solidFill>
-                <a:srgbClr val="000000"/>
-              </a:solidFill>
-              <a:effectLst/>
-              <a:uFillTx/>
-              <a:latin typeface="Arial"/>
-            </a:endParaRPr>
-          </a:p>
-        </p:txBody>
-      </p:sp>
-      <p:sp>
-        <p:nvSpPr>
-          <p:cNvPr id="116" name="TextBox 6"/>
-          <p:cNvSpPr/>
-          <p:nvPr/>
-        </p:nvSpPr>
-        <p:spPr>
-          <a:xfrm>
-            <a:off x="549000" y="6474240"/>
-            <a:ext cx="5485680" cy="167760"/>
-          </a:xfrm>
-          <a:prstGeom prst="rect">
-            <a:avLst/>
-          </a:prstGeom>
-          <a:noFill/>
-          <a:ln w="0">
-            <a:noFill/>
-          </a:ln>
-        </p:spPr>
-        <p:style>
-          <a:lnRef idx="0"/>
-          <a:fillRef idx="0"/>
-          <a:effectRef idx="0"/>
-          <a:fontRef idx="minor"/>
-        </p:style>
-        <p:txBody>
-          <a:bodyPr lIns="0" tIns="0" rIns="0" bIns="0" anchor="t">
-            <a:spAutoFit/>
-          </a:bodyPr>
-          <a:p>
-            <a:pPr/>
-            <a:endParaRPr lang="en-US" sz="1800" b="0" u="none" strike="noStrike">
-              <a:solidFill>
-                <a:srgbClr val="000000"/>
-              </a:solidFill>
-              <a:effectLst/>
-              <a:uFillTx/>
-              <a:latin typeface="Arial"/>
-            </a:endParaRPr>
-          </a:p>
-        </p:txBody>
-      </p:sp>
-      <p:sp>
-        <p:nvSpPr>
-          <p:cNvPr id="117" name="TextBox 7"/>
-          <p:cNvSpPr/>
-          <p:nvPr/>
-        </p:nvSpPr>
-        <p:spPr>
-          <a:xfrm>
-            <a:off x="11094840" y="6474240"/>
-            <a:ext cx="547920" cy="167760"/>
-          </a:xfrm>
-          <a:prstGeom prst="rect">
-            <a:avLst/>
-          </a:prstGeom>
-          <a:noFill/>
-          <a:ln w="0">
-            <a:noFill/>
-          </a:ln>
-        </p:spPr>
-        <p:style>
-          <a:lnRef idx="0"/>
-          <a:fillRef idx="0"/>
-          <a:effectRef idx="0"/>
-          <a:fontRef idx="minor"/>
-        </p:style>
-        <p:txBody>
-          <a:bodyPr lIns="0" tIns="0" rIns="0" bIns="0" anchor="t">
-            <a:spAutoFit/>
-          </a:bodyPr>
-          <a:p>
-            <a:pPr algn="r" defTabSz="457200">
-              <a:lnSpc>
-                <a:spcPct val="122000"/>
-              </a:lnSpc>
-            </a:pPr>
-            <a:r>
-              <a:rPr lang="en-US" sz="900" b="0" u="none" strike="noStrike">
-                <a:solidFill>
-                  <a:srgbClr val="D7E5D2"/>
-                </a:solidFill>
-                <a:effectLst/>
-                <a:uFillTx/>
-                <a:latin typeface="Calibri"/>
-                <a:ea typeface="DejaVu Sans"/>
-              </a:rPr>
-              <a:t>3</a:t>
             </a:r>
             <a:endParaRPr lang="en-US" sz="900" b="0" u="none" strike="noStrike">
               <a:solidFill>
